--- a/public/assets/editable/professional-logo-design-sales-presentation-2/en/Professional Logo Design Sales Presentation - en.pptx
+++ b/public/assets/editable/professional-logo-design-sales-presentation-2/en/Professional Logo Design Sales Presentation - en.pptx
@@ -2030,16 +2030,59 @@
         <p:spPr>
           <a:xfrm>
             <a:off x="457200" y="868680"/>
-            <a:ext cx="10972800" cy="594360"/>
-          </a:xfrm>
-          <a:prstGeom prst="rect">
-            <a:avLst/>
-          </a:prstGeom>
-          <a:noFill/>
-          <a:ln/>
-        </p:spPr>
-        <p:txBody>
-          <a:bodyPr wrap="square" rtlCol="0" anchor="ctr"/>
+            <a:ext cx="6949440" cy="502920"/>
+          </a:xfrm>
+          <a:prstGeom prst="rect">
+            <a:avLst/>
+          </a:prstGeom>
+          <a:noFill/>
+          <a:ln/>
+        </p:spPr>
+        <p:txBody>
+          <a:bodyPr wrap="square" rtlCol="0" anchor="t">
+            <a:normAutofit/>
+          </a:bodyPr>
+          <a:lstStyle/>
+          <a:p>
+            <a:pPr indent="0" marL="0">
+              <a:buNone/>
+            </a:pPr>
+            <a:r>
+              <a:rPr lang="en-US" sz="2200" b="1" dirty="0">
+                <a:solidFill>
+                  <a:srgbClr val="1A1A1A"/>
+                </a:solidFill>
+                <a:latin typeface="Arial" pitchFamily="34" charset="0"/>
+                <a:ea typeface="Arial" pitchFamily="34" charset="-122"/>
+                <a:cs typeface="Arial" pitchFamily="34" charset="-120"/>
+              </a:rPr>
+              <a:t>Professional Logo Design</a:t>
+            </a:r>
+            <a:endParaRPr lang="en-US" sz="2200" dirty="0"/>
+          </a:p>
+        </p:txBody>
+      </p:sp>
+      <p:sp>
+        <p:nvSpPr>
+          <p:cNvPr id="5" name="Text 3"/>
+          <p:cNvSpPr/>
+          <p:nvPr/>
+        </p:nvSpPr>
+        <p:spPr>
+          <a:xfrm>
+            <a:off x="457200" y="1481328"/>
+            <a:ext cx="6949440" cy="820928"/>
+          </a:xfrm>
+          <a:prstGeom prst="rect">
+            <a:avLst/>
+          </a:prstGeom>
+          <a:noFill/>
+          <a:ln/>
+        </p:spPr>
+        <p:txBody>
+          <a:bodyPr wrap="square" rtlCol="0" anchor="t">
+            <a:normAutofit/>
+          </a:bodyPr>
           <a:lstStyle/>
           <a:p>
             <a:pPr indent="0" marL="0">
@@ -2062,62 +2105,25 @@
       </p:sp>
       <p:sp>
         <p:nvSpPr>
-          <p:cNvPr id="5" name="Text 3"/>
-          <p:cNvSpPr/>
-          <p:nvPr/>
-        </p:nvSpPr>
-        <p:spPr>
-          <a:xfrm>
-            <a:off x="457200" y="1645920"/>
-            <a:ext cx="10972800" cy="594360"/>
-          </a:xfrm>
-          <a:prstGeom prst="rect">
-            <a:avLst/>
-          </a:prstGeom>
-          <a:noFill/>
-          <a:ln/>
-        </p:spPr>
-        <p:txBody>
-          <a:bodyPr wrap="square" rtlCol="0" anchor="ctr"/>
-          <a:lstStyle/>
-          <a:p>
-            <a:pPr indent="0" marL="0">
-              <a:buNone/>
-            </a:pPr>
-            <a:r>
-              <a:rPr lang="en-US" sz="2200" b="1" dirty="0">
-                <a:solidFill>
-                  <a:srgbClr val="1A1A1A"/>
-                </a:solidFill>
-                <a:latin typeface="Arial" pitchFamily="34" charset="0"/>
-                <a:ea typeface="Arial" pitchFamily="34" charset="-122"/>
-                <a:cs typeface="Arial" pitchFamily="34" charset="-120"/>
-              </a:rPr>
-              <a:t>PROFESSIONAL LOGO DESIGN</a:t>
-            </a:r>
-            <a:endParaRPr lang="en-US" sz="2200" dirty="0"/>
-          </a:p>
-        </p:txBody>
-      </p:sp>
-      <p:sp>
-        <p:nvSpPr>
           <p:cNvPr id="6" name="Text 4"/>
           <p:cNvSpPr/>
           <p:nvPr/>
         </p:nvSpPr>
         <p:spPr>
           <a:xfrm>
-            <a:off x="457200" y="2240280"/>
-            <a:ext cx="10972800" cy="822960"/>
-          </a:xfrm>
-          <a:prstGeom prst="rect">
-            <a:avLst/>
-          </a:prstGeom>
-          <a:noFill/>
-          <a:ln/>
-        </p:spPr>
-        <p:txBody>
-          <a:bodyPr wrap="square" rtlCol="0" anchor="t"/>
+            <a:off x="457200" y="2411984"/>
+            <a:ext cx="6949440" cy="502920"/>
+          </a:xfrm>
+          <a:prstGeom prst="rect">
+            <a:avLst/>
+          </a:prstGeom>
+          <a:noFill/>
+          <a:ln/>
+        </p:spPr>
+        <p:txBody>
+          <a:bodyPr wrap="square" rtlCol="0" anchor="t">
+            <a:normAutofit/>
+          </a:bodyPr>
           <a:lstStyle/>
           <a:p>
             <a:pPr indent="0" marL="0">
@@ -2154,8 +2160,8 @@
         </p:blipFill>
         <p:spPr>
           <a:xfrm>
-            <a:off x="7772400" y="1097280"/>
-            <a:ext cx="3657600" cy="2286000"/>
+            <a:off x="7680960" y="1005840"/>
+            <a:ext cx="3840480" cy="2560320"/>
           </a:xfrm>
           <a:prstGeom prst="rect">
             <a:avLst/>
@@ -2272,6 +2278,88 @@
           </a:p>
         </p:txBody>
       </p:sp>
+      <p:sp>
+        <p:nvSpPr>
+          <p:cNvPr id="4" name="Text 2"/>
+          <p:cNvSpPr/>
+          <p:nvPr/>
+        </p:nvSpPr>
+        <p:spPr>
+          <a:xfrm>
+            <a:off x="457200" y="868680"/>
+            <a:ext cx="10972800" cy="502920"/>
+          </a:xfrm>
+          <a:prstGeom prst="rect">
+            <a:avLst/>
+          </a:prstGeom>
+          <a:noFill/>
+          <a:ln/>
+        </p:spPr>
+        <p:txBody>
+          <a:bodyPr wrap="square" rtlCol="0" anchor="t">
+            <a:normAutofit/>
+          </a:bodyPr>
+          <a:lstStyle/>
+          <a:p>
+            <a:pPr indent="0" marL="0">
+              <a:buNone/>
+            </a:pPr>
+            <a:r>
+              <a:rPr lang="en-US" sz="2200" b="1" dirty="0">
+                <a:solidFill>
+                  <a:srgbClr val="1A1A1A"/>
+                </a:solidFill>
+                <a:latin typeface="Arial" pitchFamily="34" charset="0"/>
+                <a:ea typeface="Arial" pitchFamily="34" charset="-122"/>
+                <a:cs typeface="Arial" pitchFamily="34" charset="-120"/>
+              </a:rPr>
+              <a:t>Objection handling</a:t>
+            </a:r>
+            <a:endParaRPr lang="en-US" sz="2200" dirty="0"/>
+          </a:p>
+        </p:txBody>
+      </p:sp>
+      <p:sp>
+        <p:nvSpPr>
+          <p:cNvPr id="5" name="Text 3"/>
+          <p:cNvSpPr/>
+          <p:nvPr/>
+        </p:nvSpPr>
+        <p:spPr>
+          <a:xfrm>
+            <a:off x="457200" y="1481328"/>
+            <a:ext cx="10972800" cy="502920"/>
+          </a:xfrm>
+          <a:prstGeom prst="rect">
+            <a:avLst/>
+          </a:prstGeom>
+          <a:noFill/>
+          <a:ln/>
+        </p:spPr>
+        <p:txBody>
+          <a:bodyPr wrap="square" rtlCol="0" anchor="t">
+            <a:normAutofit/>
+          </a:bodyPr>
+          <a:lstStyle/>
+          <a:p>
+            <a:pPr indent="0" marL="0">
+              <a:buNone/>
+            </a:pPr>
+            <a:r>
+              <a:rPr lang="en-US" sz="2200" b="1" dirty="0">
+                <a:solidFill>
+                  <a:srgbClr val="1A1A1A"/>
+                </a:solidFill>
+                <a:latin typeface="Arial" pitchFamily="34" charset="0"/>
+                <a:ea typeface="Arial" pitchFamily="34" charset="-122"/>
+                <a:cs typeface="Arial" pitchFamily="34" charset="-120"/>
+              </a:rPr>
+              <a:t>The top five concerns — and how to answer them.</a:t>
+            </a:r>
+            <a:endParaRPr lang="en-US" sz="2200" dirty="0"/>
+          </a:p>
+        </p:txBody>
+      </p:sp>
     </p:spTree>
   </p:cSld>
   <p:clrMapOvr>
@@ -2382,6 +2470,334 @@
           </a:p>
         </p:txBody>
       </p:sp>
+      <p:sp>
+        <p:nvSpPr>
+          <p:cNvPr id="4" name="Text 2"/>
+          <p:cNvSpPr/>
+          <p:nvPr/>
+        </p:nvSpPr>
+        <p:spPr>
+          <a:xfrm>
+            <a:off x="457200" y="868680"/>
+            <a:ext cx="10972800" cy="502920"/>
+          </a:xfrm>
+          <a:prstGeom prst="rect">
+            <a:avLst/>
+          </a:prstGeom>
+          <a:noFill/>
+          <a:ln/>
+        </p:spPr>
+        <p:txBody>
+          <a:bodyPr wrap="square" rtlCol="0" anchor="t">
+            <a:normAutofit/>
+          </a:bodyPr>
+          <a:lstStyle/>
+          <a:p>
+            <a:pPr indent="0" marL="0">
+              <a:buNone/>
+            </a:pPr>
+            <a:r>
+              <a:rPr lang="en-US" sz="2200" b="1" dirty="0">
+                <a:solidFill>
+                  <a:srgbClr val="1A1A1A"/>
+                </a:solidFill>
+                <a:latin typeface="Arial" pitchFamily="34" charset="0"/>
+                <a:ea typeface="Arial" pitchFamily="34" charset="-122"/>
+                <a:cs typeface="Arial" pitchFamily="34" charset="-120"/>
+              </a:rPr>
+              <a:t>Competitive positioning</a:t>
+            </a:r>
+            <a:endParaRPr lang="en-US" sz="2200" dirty="0"/>
+          </a:p>
+        </p:txBody>
+      </p:sp>
+      <p:sp>
+        <p:nvSpPr>
+          <p:cNvPr id="5" name="Text 3"/>
+          <p:cNvSpPr/>
+          <p:nvPr/>
+        </p:nvSpPr>
+        <p:spPr>
+          <a:xfrm>
+            <a:off x="457200" y="1481328"/>
+            <a:ext cx="10972800" cy="502920"/>
+          </a:xfrm>
+          <a:prstGeom prst="rect">
+            <a:avLst/>
+          </a:prstGeom>
+          <a:noFill/>
+          <a:ln/>
+        </p:spPr>
+        <p:txBody>
+          <a:bodyPr wrap="square" rtlCol="0" anchor="t">
+            <a:normAutofit/>
+          </a:bodyPr>
+          <a:lstStyle/>
+          <a:p>
+            <a:pPr indent="0" marL="0">
+              <a:buNone/>
+            </a:pPr>
+            <a:r>
+              <a:rPr lang="en-US" sz="2200" b="1" dirty="0">
+                <a:solidFill>
+                  <a:srgbClr val="1A1A1A"/>
+                </a:solidFill>
+                <a:latin typeface="Arial" pitchFamily="34" charset="0"/>
+                <a:ea typeface="Arial" pitchFamily="34" charset="-122"/>
+                <a:cs typeface="Arial" pitchFamily="34" charset="-120"/>
+              </a:rPr>
+              <a:t>Why we win.</a:t>
+            </a:r>
+            <a:endParaRPr lang="en-US" sz="2200" dirty="0"/>
+          </a:p>
+        </p:txBody>
+      </p:sp>
+      <p:sp>
+        <p:nvSpPr>
+          <p:cNvPr id="6" name="Text 4"/>
+          <p:cNvSpPr/>
+          <p:nvPr/>
+        </p:nvSpPr>
+        <p:spPr>
+          <a:xfrm>
+            <a:off x="457200" y="2093976"/>
+            <a:ext cx="10972800" cy="502920"/>
+          </a:xfrm>
+          <a:prstGeom prst="rect">
+            <a:avLst/>
+          </a:prstGeom>
+          <a:noFill/>
+          <a:ln/>
+        </p:spPr>
+        <p:txBody>
+          <a:bodyPr wrap="square" rtlCol="0" anchor="t">
+            <a:normAutofit/>
+          </a:bodyPr>
+          <a:lstStyle/>
+          <a:p>
+            <a:pPr indent="0" marL="0">
+              <a:buNone/>
+            </a:pPr>
+            <a:r>
+              <a:rPr lang="en-US" sz="1300" dirty="0">
+                <a:solidFill>
+                  <a:srgbClr val="4A4A4A"/>
+                </a:solidFill>
+                <a:latin typeface="Arial" pitchFamily="34" charset="0"/>
+                <a:ea typeface="Arial" pitchFamily="34" charset="-122"/>
+                <a:cs typeface="Arial" pitchFamily="34" charset="-120"/>
+              </a:rPr>
+              <a:t>Four categories. One sentence each. Use the matching row when a prospect names a specific competitor.</a:t>
+            </a:r>
+            <a:endParaRPr lang="en-US" sz="1300" dirty="0"/>
+          </a:p>
+        </p:txBody>
+      </p:sp>
+      <p:sp>
+        <p:nvSpPr>
+          <p:cNvPr id="7" name="Text 5"/>
+          <p:cNvSpPr/>
+          <p:nvPr/>
+        </p:nvSpPr>
+        <p:spPr>
+          <a:xfrm>
+            <a:off x="457200" y="2734056"/>
+            <a:ext cx="10972800" cy="502920"/>
+          </a:xfrm>
+          <a:prstGeom prst="rect">
+            <a:avLst/>
+          </a:prstGeom>
+          <a:noFill/>
+          <a:ln/>
+        </p:spPr>
+        <p:txBody>
+          <a:bodyPr wrap="square" rtlCol="0" anchor="t">
+            <a:normAutofit/>
+          </a:bodyPr>
+          <a:lstStyle/>
+          <a:p>
+            <a:pPr indent="0" marL="0">
+              <a:buNone/>
+            </a:pPr>
+            <a:r>
+              <a:rPr lang="en-US" sz="1600" b="1" dirty="0">
+                <a:solidFill>
+                  <a:srgbClr val="1A1A1A"/>
+                </a:solidFill>
+                <a:latin typeface="Arial" pitchFamily="34" charset="0"/>
+                <a:ea typeface="Arial" pitchFamily="34" charset="-122"/>
+                <a:cs typeface="Arial" pitchFamily="34" charset="-120"/>
+              </a:rPr>
+              <a:t>Headline</a:t>
+            </a:r>
+            <a:endParaRPr lang="en-US" sz="1600" dirty="0"/>
+          </a:p>
+        </p:txBody>
+      </p:sp>
+      <p:sp>
+        <p:nvSpPr>
+          <p:cNvPr id="8" name="Text 6"/>
+          <p:cNvSpPr/>
+          <p:nvPr/>
+        </p:nvSpPr>
+        <p:spPr>
+          <a:xfrm>
+            <a:off x="457200" y="3346704"/>
+            <a:ext cx="10972800" cy="502920"/>
+          </a:xfrm>
+          <a:prstGeom prst="rect">
+            <a:avLst/>
+          </a:prstGeom>
+          <a:noFill/>
+          <a:ln/>
+        </p:spPr>
+        <p:txBody>
+          <a:bodyPr wrap="square" rtlCol="0" anchor="t">
+            <a:normAutofit/>
+          </a:bodyPr>
+          <a:lstStyle/>
+          <a:p>
+            <a:pPr indent="0" marL="0">
+              <a:buNone/>
+            </a:pPr>
+            <a:r>
+              <a:rPr lang="en-US" sz="1300" dirty="0">
+                <a:solidFill>
+                  <a:srgbClr val="4A4A4A"/>
+                </a:solidFill>
+                <a:latin typeface="Arial" pitchFamily="34" charset="0"/>
+                <a:ea typeface="Arial" pitchFamily="34" charset="-122"/>
+                <a:cs typeface="Arial" pitchFamily="34" charset="-120"/>
+              </a:rPr>
+              <a:t>Human-designed originality, full rights transfer, 11 file formats. Free tools typically offer limited originality, partial rights, and fewer formats.</a:t>
+            </a:r>
+            <a:endParaRPr lang="en-US" sz="1300" dirty="0"/>
+          </a:p>
+        </p:txBody>
+      </p:sp>
+      <p:sp>
+        <p:nvSpPr>
+          <p:cNvPr id="9" name="Text 7"/>
+          <p:cNvSpPr/>
+          <p:nvPr/>
+        </p:nvSpPr>
+        <p:spPr>
+          <a:xfrm>
+            <a:off x="457200" y="3986784"/>
+            <a:ext cx="10972800" cy="502920"/>
+          </a:xfrm>
+          <a:prstGeom prst="rect">
+            <a:avLst/>
+          </a:prstGeom>
+          <a:noFill/>
+          <a:ln/>
+        </p:spPr>
+        <p:txBody>
+          <a:bodyPr wrap="square" rtlCol="0" anchor="t">
+            <a:normAutofit/>
+          </a:bodyPr>
+          <a:lstStyle/>
+          <a:p>
+            <a:pPr indent="0" marL="0">
+              <a:buNone/>
+            </a:pPr>
+            <a:r>
+              <a:rPr lang="en-US" sz="1300" dirty="0">
+                <a:solidFill>
+                  <a:srgbClr val="4A4A4A"/>
+                </a:solidFill>
+                <a:latin typeface="Arial" pitchFamily="34" charset="0"/>
+                <a:ea typeface="Arial" pitchFamily="34" charset="-122"/>
+                <a:cs typeface="Arial" pitchFamily="34" charset="-120"/>
+              </a:rPr>
+              <a:t>A dedicated coordinator and an in-house team that's delivered 75,000+ logos — not a stranger juggling thirty concurrent projects. Predictable turnaround.</a:t>
+            </a:r>
+            <a:endParaRPr lang="en-US" sz="1300" dirty="0"/>
+          </a:p>
+        </p:txBody>
+      </p:sp>
+      <p:sp>
+        <p:nvSpPr>
+          <p:cNvPr id="10" name="Text 8"/>
+          <p:cNvSpPr/>
+          <p:nvPr/>
+        </p:nvSpPr>
+        <p:spPr>
+          <a:xfrm>
+            <a:off x="457200" y="4626864"/>
+            <a:ext cx="10972800" cy="502920"/>
+          </a:xfrm>
+          <a:prstGeom prst="rect">
+            <a:avLst/>
+          </a:prstGeom>
+          <a:noFill/>
+          <a:ln/>
+        </p:spPr>
+        <p:txBody>
+          <a:bodyPr wrap="square" rtlCol="0" anchor="t">
+            <a:normAutofit/>
+          </a:bodyPr>
+          <a:lstStyle/>
+          <a:p>
+            <a:pPr indent="0" marL="0">
+              <a:buNone/>
+            </a:pPr>
+            <a:r>
+              <a:rPr lang="en-US" sz="1300" dirty="0">
+                <a:solidFill>
+                  <a:srgbClr val="4A4A4A"/>
+                </a:solidFill>
+                <a:latin typeface="Arial" pitchFamily="34" charset="0"/>
+                <a:ea typeface="Arial" pitchFamily="34" charset="-122"/>
+                <a:cs typeface="Arial" pitchFamily="34" charset="-120"/>
+              </a:rPr>
+              <a:t>Comparable quality at a fraction of the cost, with a defined scope and timeline. No surprise invoices, no scope creep, no six-month engagements.</a:t>
+            </a:r>
+            <a:endParaRPr lang="en-US" sz="1300" dirty="0"/>
+          </a:p>
+        </p:txBody>
+      </p:sp>
+      <p:sp>
+        <p:nvSpPr>
+          <p:cNvPr id="11" name="Text 9"/>
+          <p:cNvSpPr/>
+          <p:nvPr/>
+        </p:nvSpPr>
+        <p:spPr>
+          <a:xfrm>
+            <a:off x="457200" y="5266944"/>
+            <a:ext cx="10972800" cy="502920"/>
+          </a:xfrm>
+          <a:prstGeom prst="rect">
+            <a:avLst/>
+          </a:prstGeom>
+          <a:noFill/>
+          <a:ln/>
+        </p:spPr>
+        <p:txBody>
+          <a:bodyPr wrap="square" rtlCol="0" anchor="t">
+            <a:normAutofit/>
+          </a:bodyPr>
+          <a:lstStyle/>
+          <a:p>
+            <a:pPr indent="0" marL="0">
+              <a:buNone/>
+            </a:pPr>
+            <a:r>
+              <a:rPr lang="en-US" sz="1300" dirty="0">
+                <a:solidFill>
+                  <a:srgbClr val="4A4A4A"/>
+                </a:solidFill>
+                <a:latin typeface="Arial" pitchFamily="34" charset="0"/>
+                <a:ea typeface="Arial" pitchFamily="34" charset="-122"/>
+                <a:cs typeface="Arial" pitchFamily="34" charset="-120"/>
+              </a:rPr>
+              <a:t>20% of 2025 logos are AI-generated, which means they increasingly look alike. Human-designed marks remain more differentiated — and more defensible as trademarks.</a:t>
+            </a:r>
+            <a:endParaRPr lang="en-US" sz="1300" dirty="0"/>
+          </a:p>
+        </p:txBody>
+      </p:sp>
     </p:spTree>
   </p:cSld>
   <p:clrMapOvr>
@@ -2492,6 +2908,375 @@
           </a:p>
         </p:txBody>
       </p:sp>
+      <p:sp>
+        <p:nvSpPr>
+          <p:cNvPr id="4" name="Text 2"/>
+          <p:cNvSpPr/>
+          <p:nvPr/>
+        </p:nvSpPr>
+        <p:spPr>
+          <a:xfrm>
+            <a:off x="457200" y="868680"/>
+            <a:ext cx="10972800" cy="502920"/>
+          </a:xfrm>
+          <a:prstGeom prst="rect">
+            <a:avLst/>
+          </a:prstGeom>
+          <a:noFill/>
+          <a:ln/>
+        </p:spPr>
+        <p:txBody>
+          <a:bodyPr wrap="square" rtlCol="0" anchor="t">
+            <a:normAutofit/>
+          </a:bodyPr>
+          <a:lstStyle/>
+          <a:p>
+            <a:pPr indent="0" marL="0">
+              <a:buNone/>
+            </a:pPr>
+            <a:r>
+              <a:rPr lang="en-US" sz="2200" b="1" dirty="0">
+                <a:solidFill>
+                  <a:srgbClr val="1A1A1A"/>
+                </a:solidFill>
+                <a:latin typeface="Arial" pitchFamily="34" charset="0"/>
+                <a:ea typeface="Arial" pitchFamily="34" charset="-122"/>
+                <a:cs typeface="Arial" pitchFamily="34" charset="-120"/>
+              </a:rPr>
+              <a:t>FAQs</a:t>
+            </a:r>
+            <a:endParaRPr lang="en-US" sz="2200" dirty="0"/>
+          </a:p>
+        </p:txBody>
+      </p:sp>
+      <p:sp>
+        <p:nvSpPr>
+          <p:cNvPr id="5" name="Text 3"/>
+          <p:cNvSpPr/>
+          <p:nvPr/>
+        </p:nvSpPr>
+        <p:spPr>
+          <a:xfrm>
+            <a:off x="457200" y="1481328"/>
+            <a:ext cx="10972800" cy="502920"/>
+          </a:xfrm>
+          <a:prstGeom prst="rect">
+            <a:avLst/>
+          </a:prstGeom>
+          <a:noFill/>
+          <a:ln/>
+        </p:spPr>
+        <p:txBody>
+          <a:bodyPr wrap="square" rtlCol="0" anchor="t">
+            <a:normAutofit/>
+          </a:bodyPr>
+          <a:lstStyle/>
+          <a:p>
+            <a:pPr indent="0" marL="0">
+              <a:buNone/>
+            </a:pPr>
+            <a:r>
+              <a:rPr lang="en-US" sz="2200" b="1" dirty="0">
+                <a:solidFill>
+                  <a:srgbClr val="1A1A1A"/>
+                </a:solidFill>
+                <a:latin typeface="Arial" pitchFamily="34" charset="0"/>
+                <a:ea typeface="Arial" pitchFamily="34" charset="-122"/>
+                <a:cs typeface="Arial" pitchFamily="34" charset="-120"/>
+              </a:rPr>
+              <a:t>The questions customers ask most.</a:t>
+            </a:r>
+            <a:endParaRPr lang="en-US" sz="2200" dirty="0"/>
+          </a:p>
+        </p:txBody>
+      </p:sp>
+      <p:sp>
+        <p:nvSpPr>
+          <p:cNvPr id="6" name="Text 4"/>
+          <p:cNvSpPr/>
+          <p:nvPr/>
+        </p:nvSpPr>
+        <p:spPr>
+          <a:xfrm>
+            <a:off x="457200" y="2093976"/>
+            <a:ext cx="10972800" cy="502920"/>
+          </a:xfrm>
+          <a:prstGeom prst="rect">
+            <a:avLst/>
+          </a:prstGeom>
+          <a:noFill/>
+          <a:ln/>
+        </p:spPr>
+        <p:txBody>
+          <a:bodyPr wrap="square" rtlCol="0" anchor="t">
+            <a:normAutofit/>
+          </a:bodyPr>
+          <a:lstStyle/>
+          <a:p>
+            <a:pPr indent="0" marL="0">
+              <a:buNone/>
+            </a:pPr>
+            <a:r>
+              <a:rPr lang="en-US" sz="1600" b="1" dirty="0">
+                <a:solidFill>
+                  <a:srgbClr val="1A1A1A"/>
+                </a:solidFill>
+                <a:latin typeface="Arial" pitchFamily="34" charset="0"/>
+                <a:ea typeface="Arial" pitchFamily="34" charset="-122"/>
+                <a:cs typeface="Arial" pitchFamily="34" charset="-120"/>
+              </a:rPr>
+              <a:t>How many revisions are included?</a:t>
+            </a:r>
+            <a:endParaRPr lang="en-US" sz="1600" dirty="0"/>
+          </a:p>
+        </p:txBody>
+      </p:sp>
+      <p:sp>
+        <p:nvSpPr>
+          <p:cNvPr id="7" name="Text 5"/>
+          <p:cNvSpPr/>
+          <p:nvPr/>
+        </p:nvSpPr>
+        <p:spPr>
+          <a:xfrm>
+            <a:off x="457200" y="2706624"/>
+            <a:ext cx="10972800" cy="502920"/>
+          </a:xfrm>
+          <a:prstGeom prst="rect">
+            <a:avLst/>
+          </a:prstGeom>
+          <a:noFill/>
+          <a:ln/>
+        </p:spPr>
+        <p:txBody>
+          <a:bodyPr wrap="square" rtlCol="0" anchor="t">
+            <a:normAutofit/>
+          </a:bodyPr>
+          <a:lstStyle/>
+          <a:p>
+            <a:pPr indent="0" marL="0">
+              <a:buNone/>
+            </a:pPr>
+            <a:r>
+              <a:rPr lang="en-US" sz="1300" dirty="0">
+                <a:solidFill>
+                  <a:srgbClr val="4A4A4A"/>
+                </a:solidFill>
+                <a:latin typeface="Arial" pitchFamily="34" charset="0"/>
+                <a:ea typeface="Arial" pitchFamily="34" charset="-122"/>
+                <a:cs typeface="Arial" pitchFamily="34" charset="-120"/>
+              </a:rPr>
+              <a:t>Up to three rounds in every plan. Additional revisions are available for an extra fee.</a:t>
+            </a:r>
+            <a:endParaRPr lang="en-US" sz="1300" dirty="0"/>
+          </a:p>
+        </p:txBody>
+      </p:sp>
+      <p:sp>
+        <p:nvSpPr>
+          <p:cNvPr id="8" name="Text 6"/>
+          <p:cNvSpPr/>
+          <p:nvPr/>
+        </p:nvSpPr>
+        <p:spPr>
+          <a:xfrm>
+            <a:off x="457200" y="3346704"/>
+            <a:ext cx="10972800" cy="502920"/>
+          </a:xfrm>
+          <a:prstGeom prst="rect">
+            <a:avLst/>
+          </a:prstGeom>
+          <a:noFill/>
+          <a:ln/>
+        </p:spPr>
+        <p:txBody>
+          <a:bodyPr wrap="square" rtlCol="0" anchor="t">
+            <a:normAutofit/>
+          </a:bodyPr>
+          <a:lstStyle/>
+          <a:p>
+            <a:pPr indent="0" marL="0">
+              <a:buNone/>
+            </a:pPr>
+            <a:r>
+              <a:rPr lang="en-US" sz="1600" b="1" dirty="0">
+                <a:solidFill>
+                  <a:srgbClr val="1A1A1A"/>
+                </a:solidFill>
+                <a:latin typeface="Arial" pitchFamily="34" charset="0"/>
+                <a:ea typeface="Arial" pitchFamily="34" charset="-122"/>
+                <a:cs typeface="Arial" pitchFamily="34" charset="-120"/>
+              </a:rPr>
+              <a:t>How long does it take?</a:t>
+            </a:r>
+            <a:endParaRPr lang="en-US" sz="1600" dirty="0"/>
+          </a:p>
+        </p:txBody>
+      </p:sp>
+      <p:sp>
+        <p:nvSpPr>
+          <p:cNvPr id="9" name="Text 7"/>
+          <p:cNvSpPr/>
+          <p:nvPr/>
+        </p:nvSpPr>
+        <p:spPr>
+          <a:xfrm>
+            <a:off x="457200" y="3959352"/>
+            <a:ext cx="10972800" cy="502920"/>
+          </a:xfrm>
+          <a:prstGeom prst="rect">
+            <a:avLst/>
+          </a:prstGeom>
+          <a:noFill/>
+          <a:ln/>
+        </p:spPr>
+        <p:txBody>
+          <a:bodyPr wrap="square" rtlCol="0" anchor="t">
+            <a:normAutofit/>
+          </a:bodyPr>
+          <a:lstStyle/>
+          <a:p>
+            <a:pPr indent="0" marL="0">
+              <a:buNone/>
+            </a:pPr>
+            <a:r>
+              <a:rPr lang="en-US" sz="1300" dirty="0">
+                <a:solidFill>
+                  <a:srgbClr val="4A4A4A"/>
+                </a:solidFill>
+                <a:latin typeface="Arial" pitchFamily="34" charset="0"/>
+                <a:ea typeface="Arial" pitchFamily="34" charset="-122"/>
+                <a:cs typeface="Arial" pitchFamily="34" charset="-120"/>
+              </a:rPr>
+              <a:t>Concepts arrive in three to five business days. Full projects typically complete in two to three weeks.</a:t>
+            </a:r>
+            <a:endParaRPr lang="en-US" sz="1300" dirty="0"/>
+          </a:p>
+        </p:txBody>
+      </p:sp>
+      <p:sp>
+        <p:nvSpPr>
+          <p:cNvPr id="10" name="Text 8"/>
+          <p:cNvSpPr/>
+          <p:nvPr/>
+        </p:nvSpPr>
+        <p:spPr>
+          <a:xfrm>
+            <a:off x="457200" y="4599432"/>
+            <a:ext cx="10972800" cy="502920"/>
+          </a:xfrm>
+          <a:prstGeom prst="rect">
+            <a:avLst/>
+          </a:prstGeom>
+          <a:noFill/>
+          <a:ln/>
+        </p:spPr>
+        <p:txBody>
+          <a:bodyPr wrap="square" rtlCol="0" anchor="t">
+            <a:normAutofit/>
+          </a:bodyPr>
+          <a:lstStyle/>
+          <a:p>
+            <a:pPr indent="0" marL="0">
+              <a:buNone/>
+            </a:pPr>
+            <a:r>
+              <a:rPr lang="en-US" sz="1600" b="1" dirty="0">
+                <a:solidFill>
+                  <a:srgbClr val="1A1A1A"/>
+                </a:solidFill>
+                <a:latin typeface="Arial" pitchFamily="34" charset="0"/>
+                <a:ea typeface="Arial" pitchFamily="34" charset="-122"/>
+                <a:cs typeface="Arial" pitchFamily="34" charset="-120"/>
+              </a:rPr>
+              <a:t>What file formats do I receive?</a:t>
+            </a:r>
+            <a:endParaRPr lang="en-US" sz="1600" dirty="0"/>
+          </a:p>
+        </p:txBody>
+      </p:sp>
+      <p:sp>
+        <p:nvSpPr>
+          <p:cNvPr id="11" name="Text 9"/>
+          <p:cNvSpPr/>
+          <p:nvPr/>
+        </p:nvSpPr>
+        <p:spPr>
+          <a:xfrm>
+            <a:off x="457200" y="5212080"/>
+            <a:ext cx="10972800" cy="502920"/>
+          </a:xfrm>
+          <a:prstGeom prst="rect">
+            <a:avLst/>
+          </a:prstGeom>
+          <a:noFill/>
+          <a:ln/>
+        </p:spPr>
+        <p:txBody>
+          <a:bodyPr wrap="square" rtlCol="0" anchor="t">
+            <a:normAutofit/>
+          </a:bodyPr>
+          <a:lstStyle/>
+          <a:p>
+            <a:pPr indent="0" marL="0">
+              <a:buNone/>
+            </a:pPr>
+            <a:r>
+              <a:rPr lang="en-US" sz="1300" dirty="0">
+                <a:solidFill>
+                  <a:srgbClr val="4A4A4A"/>
+                </a:solidFill>
+                <a:latin typeface="Arial" pitchFamily="34" charset="0"/>
+                <a:ea typeface="Arial" pitchFamily="34" charset="-122"/>
+                <a:cs typeface="Arial" pitchFamily="34" charset="-120"/>
+              </a:rPr>
+              <a:t>Eleven formats — AI, EPS, PDF, JPG, PNG, GIF, and ICO. Six color, five black-and-white.</a:t>
+            </a:r>
+            <a:endParaRPr lang="en-US" sz="1300" dirty="0"/>
+          </a:p>
+        </p:txBody>
+      </p:sp>
+      <p:sp>
+        <p:nvSpPr>
+          <p:cNvPr id="12" name="Text 10"/>
+          <p:cNvSpPr/>
+          <p:nvPr/>
+        </p:nvSpPr>
+        <p:spPr>
+          <a:xfrm>
+            <a:off x="457200" y="5852160"/>
+            <a:ext cx="10972800" cy="502920"/>
+          </a:xfrm>
+          <a:prstGeom prst="rect">
+            <a:avLst/>
+          </a:prstGeom>
+          <a:noFill/>
+          <a:ln/>
+        </p:spPr>
+        <p:txBody>
+          <a:bodyPr wrap="square" rtlCol="0" anchor="t">
+            <a:normAutofit/>
+          </a:bodyPr>
+          <a:lstStyle/>
+          <a:p>
+            <a:pPr indent="0" marL="0">
+              <a:buNone/>
+            </a:pPr>
+            <a:r>
+              <a:rPr lang="en-US" sz="1600" b="1" dirty="0">
+                <a:solidFill>
+                  <a:srgbClr val="1A1A1A"/>
+                </a:solidFill>
+                <a:latin typeface="Arial" pitchFamily="34" charset="0"/>
+                <a:ea typeface="Arial" pitchFamily="34" charset="-122"/>
+                <a:cs typeface="Arial" pitchFamily="34" charset="-120"/>
+              </a:rPr>
+              <a:t>Who owns the finished logo?</a:t>
+            </a:r>
+            <a:endParaRPr lang="en-US" sz="1600" dirty="0"/>
+          </a:p>
+        </p:txBody>
+      </p:sp>
     </p:spTree>
   </p:cSld>
   <p:clrMapOvr>
@@ -2602,6 +3387,88 @@
           </a:p>
         </p:txBody>
       </p:sp>
+      <p:sp>
+        <p:nvSpPr>
+          <p:cNvPr id="4" name="Text 2"/>
+          <p:cNvSpPr/>
+          <p:nvPr/>
+        </p:nvSpPr>
+        <p:spPr>
+          <a:xfrm>
+            <a:off x="457200" y="868680"/>
+            <a:ext cx="10972800" cy="502920"/>
+          </a:xfrm>
+          <a:prstGeom prst="rect">
+            <a:avLst/>
+          </a:prstGeom>
+          <a:noFill/>
+          <a:ln/>
+        </p:spPr>
+        <p:txBody>
+          <a:bodyPr wrap="square" rtlCol="0" anchor="t">
+            <a:normAutofit/>
+          </a:bodyPr>
+          <a:lstStyle/>
+          <a:p>
+            <a:pPr indent="0" marL="0">
+              <a:buNone/>
+            </a:pPr>
+            <a:r>
+              <a:rPr lang="en-US" sz="1300" dirty="0">
+                <a:solidFill>
+                  <a:srgbClr val="4A4A4A"/>
+                </a:solidFill>
+                <a:latin typeface="Arial" pitchFamily="34" charset="0"/>
+                <a:ea typeface="Arial" pitchFamily="34" charset="-122"/>
+                <a:cs typeface="Arial" pitchFamily="34" charset="-120"/>
+              </a:rPr>
+              <a:t>Have questions, want to schedule a demo, or explore how these solutions can support your sales teams today?</a:t>
+            </a:r>
+            <a:endParaRPr lang="en-US" sz="1300" dirty="0"/>
+          </a:p>
+        </p:txBody>
+      </p:sp>
+      <p:sp>
+        <p:nvSpPr>
+          <p:cNvPr id="5" name="Text 3"/>
+          <p:cNvSpPr/>
+          <p:nvPr/>
+        </p:nvSpPr>
+        <p:spPr>
+          <a:xfrm>
+            <a:off x="457200" y="1508760"/>
+            <a:ext cx="10972800" cy="502920"/>
+          </a:xfrm>
+          <a:prstGeom prst="rect">
+            <a:avLst/>
+          </a:prstGeom>
+          <a:noFill/>
+          <a:ln/>
+        </p:spPr>
+        <p:txBody>
+          <a:bodyPr wrap="square" rtlCol="0" anchor="t">
+            <a:normAutofit/>
+          </a:bodyPr>
+          <a:lstStyle/>
+          <a:p>
+            <a:pPr indent="0" marL="0">
+              <a:buNone/>
+            </a:pPr>
+            <a:r>
+              <a:rPr lang="en-US" sz="1300" dirty="0">
+                <a:solidFill>
+                  <a:srgbClr val="4A4A4A"/>
+                </a:solidFill>
+                <a:latin typeface="Arial" pitchFamily="34" charset="0"/>
+                <a:ea typeface="Arial" pitchFamily="34" charset="-122"/>
+                <a:cs typeface="Arial" pitchFamily="34" charset="-120"/>
+              </a:rPr>
+              <a:t>Contact us at marketing@hostopia.com to learn more and connect with one of our experts.</a:t>
+            </a:r>
+            <a:endParaRPr lang="en-US" sz="1300" dirty="0"/>
+          </a:p>
+        </p:txBody>
+      </p:sp>
     </p:spTree>
   </p:cSld>
   <p:clrMapOvr>
@@ -2712,6 +3579,375 @@
           </a:p>
         </p:txBody>
       </p:sp>
+      <p:sp>
+        <p:nvSpPr>
+          <p:cNvPr id="4" name="Text 2"/>
+          <p:cNvSpPr/>
+          <p:nvPr/>
+        </p:nvSpPr>
+        <p:spPr>
+          <a:xfrm>
+            <a:off x="457200" y="868680"/>
+            <a:ext cx="10972800" cy="502920"/>
+          </a:xfrm>
+          <a:prstGeom prst="rect">
+            <a:avLst/>
+          </a:prstGeom>
+          <a:noFill/>
+          <a:ln/>
+        </p:spPr>
+        <p:txBody>
+          <a:bodyPr wrap="square" rtlCol="0" anchor="t">
+            <a:normAutofit/>
+          </a:bodyPr>
+          <a:lstStyle/>
+          <a:p>
+            <a:pPr indent="0" marL="0">
+              <a:buNone/>
+            </a:pPr>
+            <a:r>
+              <a:rPr lang="en-US" sz="2200" b="1" dirty="0">
+                <a:solidFill>
+                  <a:srgbClr val="1A1A1A"/>
+                </a:solidFill>
+                <a:latin typeface="Arial" pitchFamily="34" charset="0"/>
+                <a:ea typeface="Arial" pitchFamily="34" charset="-122"/>
+                <a:cs typeface="Arial" pitchFamily="34" charset="-120"/>
+              </a:rPr>
+              <a:t>What we'll cover.</a:t>
+            </a:r>
+            <a:endParaRPr lang="en-US" sz="2200" dirty="0"/>
+          </a:p>
+        </p:txBody>
+      </p:sp>
+      <p:sp>
+        <p:nvSpPr>
+          <p:cNvPr id="5" name="Text 3"/>
+          <p:cNvSpPr/>
+          <p:nvPr/>
+        </p:nvSpPr>
+        <p:spPr>
+          <a:xfrm>
+            <a:off x="457200" y="1481328"/>
+            <a:ext cx="10972800" cy="502920"/>
+          </a:xfrm>
+          <a:prstGeom prst="rect">
+            <a:avLst/>
+          </a:prstGeom>
+          <a:noFill/>
+          <a:ln/>
+        </p:spPr>
+        <p:txBody>
+          <a:bodyPr wrap="square" rtlCol="0" anchor="t">
+            <a:normAutofit/>
+          </a:bodyPr>
+          <a:lstStyle/>
+          <a:p>
+            <a:pPr indent="0" marL="0">
+              <a:buNone/>
+            </a:pPr>
+            <a:r>
+              <a:rPr lang="en-US" sz="1300" dirty="0">
+                <a:solidFill>
+                  <a:srgbClr val="4A4A4A"/>
+                </a:solidFill>
+                <a:latin typeface="Arial" pitchFamily="34" charset="0"/>
+                <a:ea typeface="Arial" pitchFamily="34" charset="-122"/>
+                <a:cs typeface="Arial" pitchFamily="34" charset="-120"/>
+              </a:rPr>
+              <a:t>Twenty-five minutes, five sections. Most of the value lives in section five.</a:t>
+            </a:r>
+            <a:endParaRPr lang="en-US" sz="1300" dirty="0"/>
+          </a:p>
+        </p:txBody>
+      </p:sp>
+      <p:sp>
+        <p:nvSpPr>
+          <p:cNvPr id="6" name="Text 4"/>
+          <p:cNvSpPr/>
+          <p:nvPr/>
+        </p:nvSpPr>
+        <p:spPr>
+          <a:xfrm>
+            <a:off x="457200" y="2121408"/>
+            <a:ext cx="10972800" cy="502920"/>
+          </a:xfrm>
+          <a:prstGeom prst="rect">
+            <a:avLst/>
+          </a:prstGeom>
+          <a:noFill/>
+          <a:ln/>
+        </p:spPr>
+        <p:txBody>
+          <a:bodyPr wrap="square" rtlCol="0" anchor="t">
+            <a:normAutofit/>
+          </a:bodyPr>
+          <a:lstStyle/>
+          <a:p>
+            <a:pPr indent="0" marL="0">
+              <a:buNone/>
+            </a:pPr>
+            <a:r>
+              <a:rPr lang="en-US" sz="1600" b="1" dirty="0">
+                <a:solidFill>
+                  <a:srgbClr val="1A1A1A"/>
+                </a:solidFill>
+                <a:latin typeface="Arial" pitchFamily="34" charset="0"/>
+                <a:ea typeface="Arial" pitchFamily="34" charset="-122"/>
+                <a:cs typeface="Arial" pitchFamily="34" charset="-120"/>
+              </a:rPr>
+              <a:t>Why logos matter now</a:t>
+            </a:r>
+            <a:endParaRPr lang="en-US" sz="1600" dirty="0"/>
+          </a:p>
+        </p:txBody>
+      </p:sp>
+      <p:sp>
+        <p:nvSpPr>
+          <p:cNvPr id="7" name="Text 5"/>
+          <p:cNvSpPr/>
+          <p:nvPr/>
+        </p:nvSpPr>
+        <p:spPr>
+          <a:xfrm>
+            <a:off x="457200" y="2734056"/>
+            <a:ext cx="10972800" cy="502920"/>
+          </a:xfrm>
+          <a:prstGeom prst="rect">
+            <a:avLst/>
+          </a:prstGeom>
+          <a:noFill/>
+          <a:ln/>
+        </p:spPr>
+        <p:txBody>
+          <a:bodyPr wrap="square" rtlCol="0" anchor="t">
+            <a:normAutofit/>
+          </a:bodyPr>
+          <a:lstStyle/>
+          <a:p>
+            <a:pPr indent="0" marL="0">
+              <a:buNone/>
+            </a:pPr>
+            <a:r>
+              <a:rPr lang="en-US" sz="1300" dirty="0">
+                <a:solidFill>
+                  <a:srgbClr val="4A4A4A"/>
+                </a:solidFill>
+                <a:latin typeface="Arial" pitchFamily="34" charset="0"/>
+                <a:ea typeface="Arial" pitchFamily="34" charset="-122"/>
+                <a:cs typeface="Arial" pitchFamily="34" charset="-120"/>
+              </a:rPr>
+              <a:t>The 2025 data on first impressions and brand trust.</a:t>
+            </a:r>
+            <a:endParaRPr lang="en-US" sz="1300" dirty="0"/>
+          </a:p>
+        </p:txBody>
+      </p:sp>
+      <p:sp>
+        <p:nvSpPr>
+          <p:cNvPr id="8" name="Text 6"/>
+          <p:cNvSpPr/>
+          <p:nvPr/>
+        </p:nvSpPr>
+        <p:spPr>
+          <a:xfrm>
+            <a:off x="457200" y="3374136"/>
+            <a:ext cx="10972800" cy="502920"/>
+          </a:xfrm>
+          <a:prstGeom prst="rect">
+            <a:avLst/>
+          </a:prstGeom>
+          <a:noFill/>
+          <a:ln/>
+        </p:spPr>
+        <p:txBody>
+          <a:bodyPr wrap="square" rtlCol="0" anchor="t">
+            <a:normAutofit/>
+          </a:bodyPr>
+          <a:lstStyle/>
+          <a:p>
+            <a:pPr indent="0" marL="0">
+              <a:buNone/>
+            </a:pPr>
+            <a:r>
+              <a:rPr lang="en-US" sz="1600" b="1" dirty="0">
+                <a:solidFill>
+                  <a:srgbClr val="1A1A1A"/>
+                </a:solidFill>
+                <a:latin typeface="Arial" pitchFamily="34" charset="0"/>
+                <a:ea typeface="Arial" pitchFamily="34" charset="-122"/>
+                <a:cs typeface="Arial" pitchFamily="34" charset="-120"/>
+              </a:rPr>
+              <a:t>The product</a:t>
+            </a:r>
+            <a:endParaRPr lang="en-US" sz="1600" dirty="0"/>
+          </a:p>
+        </p:txBody>
+      </p:sp>
+      <p:sp>
+        <p:nvSpPr>
+          <p:cNvPr id="9" name="Text 7"/>
+          <p:cNvSpPr/>
+          <p:nvPr/>
+        </p:nvSpPr>
+        <p:spPr>
+          <a:xfrm>
+            <a:off x="457200" y="3986784"/>
+            <a:ext cx="10972800" cy="502920"/>
+          </a:xfrm>
+          <a:prstGeom prst="rect">
+            <a:avLst/>
+          </a:prstGeom>
+          <a:noFill/>
+          <a:ln/>
+        </p:spPr>
+        <p:txBody>
+          <a:bodyPr wrap="square" rtlCol="0" anchor="t">
+            <a:normAutofit/>
+          </a:bodyPr>
+          <a:lstStyle/>
+          <a:p>
+            <a:pPr indent="0" marL="0">
+              <a:buNone/>
+            </a:pPr>
+            <a:r>
+              <a:rPr lang="en-US" sz="1300" dirty="0">
+                <a:solidFill>
+                  <a:srgbClr val="4A4A4A"/>
+                </a:solidFill>
+                <a:latin typeface="Arial" pitchFamily="34" charset="0"/>
+                <a:ea typeface="Arial" pitchFamily="34" charset="-122"/>
+                <a:cs typeface="Arial" pitchFamily="34" charset="-120"/>
+              </a:rPr>
+              <a:t>What it is, who it's for, and what's included.</a:t>
+            </a:r>
+            <a:endParaRPr lang="en-US" sz="1300" dirty="0"/>
+          </a:p>
+        </p:txBody>
+      </p:sp>
+      <p:sp>
+        <p:nvSpPr>
+          <p:cNvPr id="10" name="Text 8"/>
+          <p:cNvSpPr/>
+          <p:nvPr/>
+        </p:nvSpPr>
+        <p:spPr>
+          <a:xfrm>
+            <a:off x="457200" y="4626864"/>
+            <a:ext cx="10972800" cy="502920"/>
+          </a:xfrm>
+          <a:prstGeom prst="rect">
+            <a:avLst/>
+          </a:prstGeom>
+          <a:noFill/>
+          <a:ln/>
+        </p:spPr>
+        <p:txBody>
+          <a:bodyPr wrap="square" rtlCol="0" anchor="t">
+            <a:normAutofit/>
+          </a:bodyPr>
+          <a:lstStyle/>
+          <a:p>
+            <a:pPr indent="0" marL="0">
+              <a:buNone/>
+            </a:pPr>
+            <a:r>
+              <a:rPr lang="en-US" sz="1600" b="1" dirty="0">
+                <a:solidFill>
+                  <a:srgbClr val="1A1A1A"/>
+                </a:solidFill>
+                <a:latin typeface="Arial" pitchFamily="34" charset="0"/>
+                <a:ea typeface="Arial" pitchFamily="34" charset="-122"/>
+                <a:cs typeface="Arial" pitchFamily="34" charset="-120"/>
+              </a:rPr>
+              <a:t>The creative process</a:t>
+            </a:r>
+            <a:endParaRPr lang="en-US" sz="1600" dirty="0"/>
+          </a:p>
+        </p:txBody>
+      </p:sp>
+      <p:sp>
+        <p:nvSpPr>
+          <p:cNvPr id="11" name="Text 9"/>
+          <p:cNvSpPr/>
+          <p:nvPr/>
+        </p:nvSpPr>
+        <p:spPr>
+          <a:xfrm>
+            <a:off x="457200" y="5239512"/>
+            <a:ext cx="10972800" cy="502920"/>
+          </a:xfrm>
+          <a:prstGeom prst="rect">
+            <a:avLst/>
+          </a:prstGeom>
+          <a:noFill/>
+          <a:ln/>
+        </p:spPr>
+        <p:txBody>
+          <a:bodyPr wrap="square" rtlCol="0" anchor="t">
+            <a:normAutofit/>
+          </a:bodyPr>
+          <a:lstStyle/>
+          <a:p>
+            <a:pPr indent="0" marL="0">
+              <a:buNone/>
+            </a:pPr>
+            <a:r>
+              <a:rPr lang="en-US" sz="1300" dirty="0">
+                <a:solidFill>
+                  <a:srgbClr val="4A4A4A"/>
+                </a:solidFill>
+                <a:latin typeface="Arial" pitchFamily="34" charset="0"/>
+                <a:ea typeface="Arial" pitchFamily="34" charset="-122"/>
+                <a:cs typeface="Arial" pitchFamily="34" charset="-120"/>
+              </a:rPr>
+              <a:t>From brief to final files in 2–3 weeks.</a:t>
+            </a:r>
+            <a:endParaRPr lang="en-US" sz="1300" dirty="0"/>
+          </a:p>
+        </p:txBody>
+      </p:sp>
+      <p:sp>
+        <p:nvSpPr>
+          <p:cNvPr id="12" name="Text 10"/>
+          <p:cNvSpPr/>
+          <p:nvPr/>
+        </p:nvSpPr>
+        <p:spPr>
+          <a:xfrm>
+            <a:off x="457200" y="5879592"/>
+            <a:ext cx="10972800" cy="502920"/>
+          </a:xfrm>
+          <a:prstGeom prst="rect">
+            <a:avLst/>
+          </a:prstGeom>
+          <a:noFill/>
+          <a:ln/>
+        </p:spPr>
+        <p:txBody>
+          <a:bodyPr wrap="square" rtlCol="0" anchor="t">
+            <a:normAutofit/>
+          </a:bodyPr>
+          <a:lstStyle/>
+          <a:p>
+            <a:pPr indent="0" marL="0">
+              <a:buNone/>
+            </a:pPr>
+            <a:r>
+              <a:rPr lang="en-US" sz="1600" b="1" dirty="0">
+                <a:solidFill>
+                  <a:srgbClr val="1A1A1A"/>
+                </a:solidFill>
+                <a:latin typeface="Arial" pitchFamily="34" charset="0"/>
+                <a:ea typeface="Arial" pitchFamily="34" charset="-122"/>
+                <a:cs typeface="Arial" pitchFamily="34" charset="-120"/>
+              </a:rPr>
+              <a:t>Plans</a:t>
+            </a:r>
+            <a:endParaRPr lang="en-US" sz="1600" dirty="0"/>
+          </a:p>
+        </p:txBody>
+      </p:sp>
     </p:spTree>
   </p:cSld>
   <p:clrMapOvr>
@@ -2822,6 +4058,375 @@
           </a:p>
         </p:txBody>
       </p:sp>
+      <p:sp>
+        <p:nvSpPr>
+          <p:cNvPr id="4" name="Text 2"/>
+          <p:cNvSpPr/>
+          <p:nvPr/>
+        </p:nvSpPr>
+        <p:spPr>
+          <a:xfrm>
+            <a:off x="457200" y="868680"/>
+            <a:ext cx="10972800" cy="502920"/>
+          </a:xfrm>
+          <a:prstGeom prst="rect">
+            <a:avLst/>
+          </a:prstGeom>
+          <a:noFill/>
+          <a:ln/>
+        </p:spPr>
+        <p:txBody>
+          <a:bodyPr wrap="square" rtlCol="0" anchor="t">
+            <a:normAutofit/>
+          </a:bodyPr>
+          <a:lstStyle/>
+          <a:p>
+            <a:pPr indent="0" marL="0">
+              <a:buNone/>
+            </a:pPr>
+            <a:r>
+              <a:rPr lang="en-US" sz="2200" b="1" dirty="0">
+                <a:solidFill>
+                  <a:srgbClr val="1A1A1A"/>
+                </a:solidFill>
+                <a:latin typeface="Arial" pitchFamily="34" charset="0"/>
+                <a:ea typeface="Arial" pitchFamily="34" charset="-122"/>
+                <a:cs typeface="Arial" pitchFamily="34" charset="-120"/>
+              </a:rPr>
+              <a:t>Why logos matter</a:t>
+            </a:r>
+            <a:endParaRPr lang="en-US" sz="2200" dirty="0"/>
+          </a:p>
+        </p:txBody>
+      </p:sp>
+      <p:sp>
+        <p:nvSpPr>
+          <p:cNvPr id="5" name="Text 3"/>
+          <p:cNvSpPr/>
+          <p:nvPr/>
+        </p:nvSpPr>
+        <p:spPr>
+          <a:xfrm>
+            <a:off x="457200" y="1481328"/>
+            <a:ext cx="10972800" cy="502920"/>
+          </a:xfrm>
+          <a:prstGeom prst="rect">
+            <a:avLst/>
+          </a:prstGeom>
+          <a:noFill/>
+          <a:ln/>
+        </p:spPr>
+        <p:txBody>
+          <a:bodyPr wrap="square" rtlCol="0" anchor="t">
+            <a:normAutofit/>
+          </a:bodyPr>
+          <a:lstStyle/>
+          <a:p>
+            <a:pPr indent="0" marL="0">
+              <a:buNone/>
+            </a:pPr>
+            <a:r>
+              <a:rPr lang="en-US" sz="2200" b="1" dirty="0">
+                <a:solidFill>
+                  <a:srgbClr val="1A1A1A"/>
+                </a:solidFill>
+                <a:latin typeface="Arial" pitchFamily="34" charset="0"/>
+                <a:ea typeface="Arial" pitchFamily="34" charset="-122"/>
+                <a:cs typeface="Arial" pitchFamily="34" charset="-120"/>
+              </a:rPr>
+              <a:t>The time consumers take to form a first impression of a business.</a:t>
+            </a:r>
+            <a:endParaRPr lang="en-US" sz="2200" dirty="0"/>
+          </a:p>
+        </p:txBody>
+      </p:sp>
+      <p:sp>
+        <p:nvSpPr>
+          <p:cNvPr id="6" name="Text 4"/>
+          <p:cNvSpPr/>
+          <p:nvPr/>
+        </p:nvSpPr>
+        <p:spPr>
+          <a:xfrm>
+            <a:off x="457200" y="2093976"/>
+            <a:ext cx="10972800" cy="502920"/>
+          </a:xfrm>
+          <a:prstGeom prst="rect">
+            <a:avLst/>
+          </a:prstGeom>
+          <a:noFill/>
+          <a:ln/>
+        </p:spPr>
+        <p:txBody>
+          <a:bodyPr wrap="square" rtlCol="0" anchor="t">
+            <a:normAutofit/>
+          </a:bodyPr>
+          <a:lstStyle/>
+          <a:p>
+            <a:pPr indent="0" marL="0">
+              <a:buNone/>
+            </a:pPr>
+            <a:r>
+              <a:rPr lang="en-US" sz="1300" dirty="0">
+                <a:solidFill>
+                  <a:srgbClr val="4A4A4A"/>
+                </a:solidFill>
+                <a:latin typeface="Arial" pitchFamily="34" charset="0"/>
+                <a:ea typeface="Arial" pitchFamily="34" charset="-122"/>
+                <a:cs typeface="Arial" pitchFamily="34" charset="-120"/>
+              </a:rPr>
+              <a:t>A professional logo is the strongest visual signal that shapes that impression — and the brain decides whether to trust a business in that window.</a:t>
+            </a:r>
+            <a:endParaRPr lang="en-US" sz="1300" dirty="0"/>
+          </a:p>
+        </p:txBody>
+      </p:sp>
+      <p:sp>
+        <p:nvSpPr>
+          <p:cNvPr id="7" name="Text 5"/>
+          <p:cNvSpPr/>
+          <p:nvPr/>
+        </p:nvSpPr>
+        <p:spPr>
+          <a:xfrm>
+            <a:off x="457200" y="2734056"/>
+            <a:ext cx="10972800" cy="502920"/>
+          </a:xfrm>
+          <a:prstGeom prst="rect">
+            <a:avLst/>
+          </a:prstGeom>
+          <a:noFill/>
+          <a:ln/>
+        </p:spPr>
+        <p:txBody>
+          <a:bodyPr wrap="square" rtlCol="0" anchor="t">
+            <a:normAutofit/>
+          </a:bodyPr>
+          <a:lstStyle/>
+          <a:p>
+            <a:pPr indent="0" marL="0">
+              <a:buNone/>
+            </a:pPr>
+            <a:r>
+              <a:rPr lang="en-US" sz="1600" b="1" dirty="0">
+                <a:solidFill>
+                  <a:srgbClr val="1A1A1A"/>
+                </a:solidFill>
+                <a:latin typeface="Arial" pitchFamily="34" charset="0"/>
+                <a:ea typeface="Arial" pitchFamily="34" charset="-122"/>
+                <a:cs typeface="Arial" pitchFamily="34" charset="-120"/>
+              </a:rPr>
+              <a:t>Recognition lift</a:t>
+            </a:r>
+            <a:endParaRPr lang="en-US" sz="1600" dirty="0"/>
+          </a:p>
+        </p:txBody>
+      </p:sp>
+      <p:sp>
+        <p:nvSpPr>
+          <p:cNvPr id="8" name="Text 6"/>
+          <p:cNvSpPr/>
+          <p:nvPr/>
+        </p:nvSpPr>
+        <p:spPr>
+          <a:xfrm>
+            <a:off x="457200" y="3346704"/>
+            <a:ext cx="10972800" cy="502920"/>
+          </a:xfrm>
+          <a:prstGeom prst="rect">
+            <a:avLst/>
+          </a:prstGeom>
+          <a:noFill/>
+          <a:ln/>
+        </p:spPr>
+        <p:txBody>
+          <a:bodyPr wrap="square" rtlCol="0" anchor="t">
+            <a:normAutofit/>
+          </a:bodyPr>
+          <a:lstStyle/>
+          <a:p>
+            <a:pPr indent="0" marL="0">
+              <a:buNone/>
+            </a:pPr>
+            <a:r>
+              <a:rPr lang="en-US" sz="1300" dirty="0">
+                <a:solidFill>
+                  <a:srgbClr val="4A4A4A"/>
+                </a:solidFill>
+                <a:latin typeface="Arial" pitchFamily="34" charset="0"/>
+                <a:ea typeface="Arial" pitchFamily="34" charset="-122"/>
+                <a:cs typeface="Arial" pitchFamily="34" charset="-120"/>
+              </a:rPr>
+              <a:t>Brand recognition lift from a well-designed logo.</a:t>
+            </a:r>
+            <a:endParaRPr lang="en-US" sz="1300" dirty="0"/>
+          </a:p>
+        </p:txBody>
+      </p:sp>
+      <p:sp>
+        <p:nvSpPr>
+          <p:cNvPr id="9" name="Text 7"/>
+          <p:cNvSpPr/>
+          <p:nvPr/>
+        </p:nvSpPr>
+        <p:spPr>
+          <a:xfrm>
+            <a:off x="457200" y="3986784"/>
+            <a:ext cx="10972800" cy="502920"/>
+          </a:xfrm>
+          <a:prstGeom prst="rect">
+            <a:avLst/>
+          </a:prstGeom>
+          <a:noFill/>
+          <a:ln/>
+        </p:spPr>
+        <p:txBody>
+          <a:bodyPr wrap="square" rtlCol="0" anchor="t">
+            <a:normAutofit/>
+          </a:bodyPr>
+          <a:lstStyle/>
+          <a:p>
+            <a:pPr indent="0" marL="0">
+              <a:buNone/>
+            </a:pPr>
+            <a:r>
+              <a:rPr lang="en-US" sz="1600" b="1" dirty="0">
+                <a:solidFill>
+                  <a:srgbClr val="1A1A1A"/>
+                </a:solidFill>
+                <a:latin typeface="Arial" pitchFamily="34" charset="0"/>
+                <a:ea typeface="Arial" pitchFamily="34" charset="-122"/>
+                <a:cs typeface="Arial" pitchFamily="34" charset="-120"/>
+              </a:rPr>
+              <a:t>Trust boost</a:t>
+            </a:r>
+            <a:endParaRPr lang="en-US" sz="1600" dirty="0"/>
+          </a:p>
+        </p:txBody>
+      </p:sp>
+      <p:sp>
+        <p:nvSpPr>
+          <p:cNvPr id="10" name="Text 8"/>
+          <p:cNvSpPr/>
+          <p:nvPr/>
+        </p:nvSpPr>
+        <p:spPr>
+          <a:xfrm>
+            <a:off x="457200" y="4599432"/>
+            <a:ext cx="10972800" cy="502920"/>
+          </a:xfrm>
+          <a:prstGeom prst="rect">
+            <a:avLst/>
+          </a:prstGeom>
+          <a:noFill/>
+          <a:ln/>
+        </p:spPr>
+        <p:txBody>
+          <a:bodyPr wrap="square" rtlCol="0" anchor="t">
+            <a:normAutofit/>
+          </a:bodyPr>
+          <a:lstStyle/>
+          <a:p>
+            <a:pPr indent="0" marL="0">
+              <a:buNone/>
+            </a:pPr>
+            <a:r>
+              <a:rPr lang="en-US" sz="1300" dirty="0">
+                <a:solidFill>
+                  <a:srgbClr val="4A4A4A"/>
+                </a:solidFill>
+                <a:latin typeface="Arial" pitchFamily="34" charset="0"/>
+                <a:ea typeface="Arial" pitchFamily="34" charset="-122"/>
+                <a:cs typeface="Arial" pitchFamily="34" charset="-120"/>
+              </a:rPr>
+              <a:t>Trust boost prospects feel after seeing a polished logo.</a:t>
+            </a:r>
+            <a:endParaRPr lang="en-US" sz="1300" dirty="0"/>
+          </a:p>
+        </p:txBody>
+      </p:sp>
+      <p:sp>
+        <p:nvSpPr>
+          <p:cNvPr id="11" name="Text 9"/>
+          <p:cNvSpPr/>
+          <p:nvPr/>
+        </p:nvSpPr>
+        <p:spPr>
+          <a:xfrm>
+            <a:off x="457200" y="5239512"/>
+            <a:ext cx="10972800" cy="502920"/>
+          </a:xfrm>
+          <a:prstGeom prst="rect">
+            <a:avLst/>
+          </a:prstGeom>
+          <a:noFill/>
+          <a:ln/>
+        </p:spPr>
+        <p:txBody>
+          <a:bodyPr wrap="square" rtlCol="0" anchor="t">
+            <a:normAutofit/>
+          </a:bodyPr>
+          <a:lstStyle/>
+          <a:p>
+            <a:pPr indent="0" marL="0">
+              <a:buNone/>
+            </a:pPr>
+            <a:r>
+              <a:rPr lang="en-US" sz="1600" b="1" dirty="0">
+                <a:solidFill>
+                  <a:srgbClr val="1A1A1A"/>
+                </a:solidFill>
+                <a:latin typeface="Arial" pitchFamily="34" charset="0"/>
+                <a:ea typeface="Arial" pitchFamily="34" charset="-122"/>
+                <a:cs typeface="Arial" pitchFamily="34" charset="-120"/>
+              </a:rPr>
+              <a:t>Impression weight</a:t>
+            </a:r>
+            <a:endParaRPr lang="en-US" sz="1600" dirty="0"/>
+          </a:p>
+        </p:txBody>
+      </p:sp>
+      <p:sp>
+        <p:nvSpPr>
+          <p:cNvPr id="12" name="Text 10"/>
+          <p:cNvSpPr/>
+          <p:nvPr/>
+        </p:nvSpPr>
+        <p:spPr>
+          <a:xfrm>
+            <a:off x="457200" y="5852160"/>
+            <a:ext cx="10972800" cy="502920"/>
+          </a:xfrm>
+          <a:prstGeom prst="rect">
+            <a:avLst/>
+          </a:prstGeom>
+          <a:noFill/>
+          <a:ln/>
+        </p:spPr>
+        <p:txBody>
+          <a:bodyPr wrap="square" rtlCol="0" anchor="t">
+            <a:normAutofit/>
+          </a:bodyPr>
+          <a:lstStyle/>
+          <a:p>
+            <a:pPr indent="0" marL="0">
+              <a:buNone/>
+            </a:pPr>
+            <a:r>
+              <a:rPr lang="en-US" sz="1300" dirty="0">
+                <a:solidFill>
+                  <a:srgbClr val="4A4A4A"/>
+                </a:solidFill>
+                <a:latin typeface="Arial" pitchFamily="34" charset="0"/>
+                <a:ea typeface="Arial" pitchFamily="34" charset="-122"/>
+                <a:cs typeface="Arial" pitchFamily="34" charset="-120"/>
+              </a:rPr>
+              <a:t>Share of first-impression weight driven by logo color alone.</a:t>
+            </a:r>
+            <a:endParaRPr lang="en-US" sz="1300" dirty="0"/>
+          </a:p>
+        </p:txBody>
+      </p:sp>
     </p:spTree>
   </p:cSld>
   <p:clrMapOvr>
@@ -2932,6 +4537,375 @@
           </a:p>
         </p:txBody>
       </p:sp>
+      <p:sp>
+        <p:nvSpPr>
+          <p:cNvPr id="4" name="Text 2"/>
+          <p:cNvSpPr/>
+          <p:nvPr/>
+        </p:nvSpPr>
+        <p:spPr>
+          <a:xfrm>
+            <a:off x="457200" y="868680"/>
+            <a:ext cx="10972800" cy="502920"/>
+          </a:xfrm>
+          <a:prstGeom prst="rect">
+            <a:avLst/>
+          </a:prstGeom>
+          <a:noFill/>
+          <a:ln/>
+        </p:spPr>
+        <p:txBody>
+          <a:bodyPr wrap="square" rtlCol="0" anchor="t">
+            <a:normAutofit/>
+          </a:bodyPr>
+          <a:lstStyle/>
+          <a:p>
+            <a:pPr indent="0" marL="0">
+              <a:buNone/>
+            </a:pPr>
+            <a:r>
+              <a:rPr lang="en-US" sz="2200" b="1" dirty="0">
+                <a:solidFill>
+                  <a:srgbClr val="1A1A1A"/>
+                </a:solidFill>
+                <a:latin typeface="Arial" pitchFamily="34" charset="0"/>
+                <a:ea typeface="Arial" pitchFamily="34" charset="-122"/>
+                <a:cs typeface="Arial" pitchFamily="34" charset="-120"/>
+              </a:rPr>
+              <a:t>What's at stake</a:t>
+            </a:r>
+            <a:endParaRPr lang="en-US" sz="2200" dirty="0"/>
+          </a:p>
+        </p:txBody>
+      </p:sp>
+      <p:sp>
+        <p:nvSpPr>
+          <p:cNvPr id="5" name="Text 3"/>
+          <p:cNvSpPr/>
+          <p:nvPr/>
+        </p:nvSpPr>
+        <p:spPr>
+          <a:xfrm>
+            <a:off x="457200" y="1481328"/>
+            <a:ext cx="10972800" cy="502920"/>
+          </a:xfrm>
+          <a:prstGeom prst="rect">
+            <a:avLst/>
+          </a:prstGeom>
+          <a:noFill/>
+          <a:ln/>
+        </p:spPr>
+        <p:txBody>
+          <a:bodyPr wrap="square" rtlCol="0" anchor="t">
+            <a:normAutofit/>
+          </a:bodyPr>
+          <a:lstStyle/>
+          <a:p>
+            <a:pPr indent="0" marL="0">
+              <a:buNone/>
+            </a:pPr>
+            <a:r>
+              <a:rPr lang="en-US" sz="2200" b="1" dirty="0">
+                <a:solidFill>
+                  <a:srgbClr val="1A1A1A"/>
+                </a:solidFill>
+                <a:latin typeface="Arial" pitchFamily="34" charset="0"/>
+                <a:ea typeface="Arial" pitchFamily="34" charset="-122"/>
+                <a:cs typeface="Arial" pitchFamily="34" charset="-120"/>
+              </a:rPr>
+              <a:t>The cost of a weak or missing logo.</a:t>
+            </a:r>
+            <a:endParaRPr lang="en-US" sz="2200" dirty="0"/>
+          </a:p>
+        </p:txBody>
+      </p:sp>
+      <p:sp>
+        <p:nvSpPr>
+          <p:cNvPr id="6" name="Text 4"/>
+          <p:cNvSpPr/>
+          <p:nvPr/>
+        </p:nvSpPr>
+        <p:spPr>
+          <a:xfrm>
+            <a:off x="457200" y="2093976"/>
+            <a:ext cx="10972800" cy="502920"/>
+          </a:xfrm>
+          <a:prstGeom prst="rect">
+            <a:avLst/>
+          </a:prstGeom>
+          <a:noFill/>
+          <a:ln/>
+        </p:spPr>
+        <p:txBody>
+          <a:bodyPr wrap="square" rtlCol="0" anchor="t">
+            <a:normAutofit/>
+          </a:bodyPr>
+          <a:lstStyle/>
+          <a:p>
+            <a:pPr indent="0" marL="0">
+              <a:buNone/>
+            </a:pPr>
+            <a:r>
+              <a:rPr lang="en-US" sz="1600" b="1" dirty="0">
+                <a:solidFill>
+                  <a:srgbClr val="1A1A1A"/>
+                </a:solidFill>
+                <a:latin typeface="Arial" pitchFamily="34" charset="0"/>
+                <a:ea typeface="Arial" pitchFamily="34" charset="-122"/>
+                <a:cs typeface="Arial" pitchFamily="34" charset="-120"/>
+              </a:rPr>
+              <a:t>Cost 01</a:t>
+            </a:r>
+            <a:endParaRPr lang="en-US" sz="1600" dirty="0"/>
+          </a:p>
+        </p:txBody>
+      </p:sp>
+      <p:sp>
+        <p:nvSpPr>
+          <p:cNvPr id="7" name="Text 5"/>
+          <p:cNvSpPr/>
+          <p:nvPr/>
+        </p:nvSpPr>
+        <p:spPr>
+          <a:xfrm>
+            <a:off x="457200" y="2706624"/>
+            <a:ext cx="10972800" cy="502920"/>
+          </a:xfrm>
+          <a:prstGeom prst="rect">
+            <a:avLst/>
+          </a:prstGeom>
+          <a:noFill/>
+          <a:ln/>
+        </p:spPr>
+        <p:txBody>
+          <a:bodyPr wrap="square" rtlCol="0" anchor="t">
+            <a:normAutofit/>
+          </a:bodyPr>
+          <a:lstStyle/>
+          <a:p>
+            <a:pPr indent="0" marL="0">
+              <a:buNone/>
+            </a:pPr>
+            <a:r>
+              <a:rPr lang="en-US" sz="1600" b="1" dirty="0">
+                <a:solidFill>
+                  <a:srgbClr val="1A1A1A"/>
+                </a:solidFill>
+                <a:latin typeface="Arial" pitchFamily="34" charset="0"/>
+                <a:ea typeface="Arial" pitchFamily="34" charset="-122"/>
+                <a:cs typeface="Arial" pitchFamily="34" charset="-120"/>
+              </a:rPr>
+              <a:t>Lost credibility</a:t>
+            </a:r>
+            <a:endParaRPr lang="en-US" sz="1600" dirty="0"/>
+          </a:p>
+        </p:txBody>
+      </p:sp>
+      <p:sp>
+        <p:nvSpPr>
+          <p:cNvPr id="8" name="Text 6"/>
+          <p:cNvSpPr/>
+          <p:nvPr/>
+        </p:nvSpPr>
+        <p:spPr>
+          <a:xfrm>
+            <a:off x="457200" y="3319272"/>
+            <a:ext cx="10972800" cy="502920"/>
+          </a:xfrm>
+          <a:prstGeom prst="rect">
+            <a:avLst/>
+          </a:prstGeom>
+          <a:noFill/>
+          <a:ln/>
+        </p:spPr>
+        <p:txBody>
+          <a:bodyPr wrap="square" rtlCol="0" anchor="t">
+            <a:normAutofit/>
+          </a:bodyPr>
+          <a:lstStyle/>
+          <a:p>
+            <a:pPr indent="0" marL="0">
+              <a:buNone/>
+            </a:pPr>
+            <a:r>
+              <a:rPr lang="en-US" sz="1300" dirty="0">
+                <a:solidFill>
+                  <a:srgbClr val="4A4A4A"/>
+                </a:solidFill>
+                <a:latin typeface="Arial" pitchFamily="34" charset="0"/>
+                <a:ea typeface="Arial" pitchFamily="34" charset="-122"/>
+                <a:cs typeface="Arial" pitchFamily="34" charset="-120"/>
+              </a:rPr>
+              <a:t>A logo makes a business look established. Without one, prospects default to whichever competitor looks more professional.</a:t>
+            </a:r>
+            <a:endParaRPr lang="en-US" sz="1300" dirty="0"/>
+          </a:p>
+        </p:txBody>
+      </p:sp>
+      <p:sp>
+        <p:nvSpPr>
+          <p:cNvPr id="9" name="Text 7"/>
+          <p:cNvSpPr/>
+          <p:nvPr/>
+        </p:nvSpPr>
+        <p:spPr>
+          <a:xfrm>
+            <a:off x="457200" y="3959352"/>
+            <a:ext cx="10972800" cy="502920"/>
+          </a:xfrm>
+          <a:prstGeom prst="rect">
+            <a:avLst/>
+          </a:prstGeom>
+          <a:noFill/>
+          <a:ln/>
+        </p:spPr>
+        <p:txBody>
+          <a:bodyPr wrap="square" rtlCol="0" anchor="t">
+            <a:normAutofit/>
+          </a:bodyPr>
+          <a:lstStyle/>
+          <a:p>
+            <a:pPr indent="0" marL="0">
+              <a:buNone/>
+            </a:pPr>
+            <a:r>
+              <a:rPr lang="en-US" sz="1600" b="1" dirty="0">
+                <a:solidFill>
+                  <a:srgbClr val="1A1A1A"/>
+                </a:solidFill>
+                <a:latin typeface="Arial" pitchFamily="34" charset="0"/>
+                <a:ea typeface="Arial" pitchFamily="34" charset="-122"/>
+                <a:cs typeface="Arial" pitchFamily="34" charset="-120"/>
+              </a:rPr>
+              <a:t>Cost 02</a:t>
+            </a:r>
+            <a:endParaRPr lang="en-US" sz="1600" dirty="0"/>
+          </a:p>
+        </p:txBody>
+      </p:sp>
+      <p:sp>
+        <p:nvSpPr>
+          <p:cNvPr id="10" name="Text 8"/>
+          <p:cNvSpPr/>
+          <p:nvPr/>
+        </p:nvSpPr>
+        <p:spPr>
+          <a:xfrm>
+            <a:off x="457200" y="4572000"/>
+            <a:ext cx="10972800" cy="502920"/>
+          </a:xfrm>
+          <a:prstGeom prst="rect">
+            <a:avLst/>
+          </a:prstGeom>
+          <a:noFill/>
+          <a:ln/>
+        </p:spPr>
+        <p:txBody>
+          <a:bodyPr wrap="square" rtlCol="0" anchor="t">
+            <a:normAutofit/>
+          </a:bodyPr>
+          <a:lstStyle/>
+          <a:p>
+            <a:pPr indent="0" marL="0">
+              <a:buNone/>
+            </a:pPr>
+            <a:r>
+              <a:rPr lang="en-US" sz="1600" b="1" dirty="0">
+                <a:solidFill>
+                  <a:srgbClr val="1A1A1A"/>
+                </a:solidFill>
+                <a:latin typeface="Arial" pitchFamily="34" charset="0"/>
+                <a:ea typeface="Arial" pitchFamily="34" charset="-122"/>
+                <a:cs typeface="Arial" pitchFamily="34" charset="-120"/>
+              </a:rPr>
+              <a:t>Missed differentiation</a:t>
+            </a:r>
+            <a:endParaRPr lang="en-US" sz="1600" dirty="0"/>
+          </a:p>
+        </p:txBody>
+      </p:sp>
+      <p:sp>
+        <p:nvSpPr>
+          <p:cNvPr id="11" name="Text 9"/>
+          <p:cNvSpPr/>
+          <p:nvPr/>
+        </p:nvSpPr>
+        <p:spPr>
+          <a:xfrm>
+            <a:off x="457200" y="5184648"/>
+            <a:ext cx="10972800" cy="502920"/>
+          </a:xfrm>
+          <a:prstGeom prst="rect">
+            <a:avLst/>
+          </a:prstGeom>
+          <a:noFill/>
+          <a:ln/>
+        </p:spPr>
+        <p:txBody>
+          <a:bodyPr wrap="square" rtlCol="0" anchor="t">
+            <a:normAutofit/>
+          </a:bodyPr>
+          <a:lstStyle/>
+          <a:p>
+            <a:pPr indent="0" marL="0">
+              <a:buNone/>
+            </a:pPr>
+            <a:r>
+              <a:rPr lang="en-US" sz="1300" dirty="0">
+                <a:solidFill>
+                  <a:srgbClr val="4A4A4A"/>
+                </a:solidFill>
+                <a:latin typeface="Arial" pitchFamily="34" charset="0"/>
+                <a:ea typeface="Arial" pitchFamily="34" charset="-122"/>
+                <a:cs typeface="Arial" pitchFamily="34" charset="-120"/>
+              </a:rPr>
+              <a:t>Logos are how customers tell one business from another. A generic or absent mark means customers can't find you.</a:t>
+            </a:r>
+            <a:endParaRPr lang="en-US" sz="1300" dirty="0"/>
+          </a:p>
+        </p:txBody>
+      </p:sp>
+      <p:sp>
+        <p:nvSpPr>
+          <p:cNvPr id="12" name="Text 10"/>
+          <p:cNvSpPr/>
+          <p:nvPr/>
+        </p:nvSpPr>
+        <p:spPr>
+          <a:xfrm>
+            <a:off x="457200" y="5824728"/>
+            <a:ext cx="10972800" cy="502920"/>
+          </a:xfrm>
+          <a:prstGeom prst="rect">
+            <a:avLst/>
+          </a:prstGeom>
+          <a:noFill/>
+          <a:ln/>
+        </p:spPr>
+        <p:txBody>
+          <a:bodyPr wrap="square" rtlCol="0" anchor="t">
+            <a:normAutofit/>
+          </a:bodyPr>
+          <a:lstStyle/>
+          <a:p>
+            <a:pPr indent="0" marL="0">
+              <a:buNone/>
+            </a:pPr>
+            <a:r>
+              <a:rPr lang="en-US" sz="1600" b="1" dirty="0">
+                <a:solidFill>
+                  <a:srgbClr val="1A1A1A"/>
+                </a:solidFill>
+                <a:latin typeface="Arial" pitchFamily="34" charset="0"/>
+                <a:ea typeface="Arial" pitchFamily="34" charset="-122"/>
+                <a:cs typeface="Arial" pitchFamily="34" charset="-120"/>
+              </a:rPr>
+              <a:t>Cost 03</a:t>
+            </a:r>
+            <a:endParaRPr lang="en-US" sz="1600" dirty="0"/>
+          </a:p>
+        </p:txBody>
+      </p:sp>
     </p:spTree>
   </p:cSld>
   <p:clrMapOvr>
@@ -3042,9 +5016,378 @@
           </a:p>
         </p:txBody>
       </p:sp>
+      <p:sp>
+        <p:nvSpPr>
+          <p:cNvPr id="4" name="Text 2"/>
+          <p:cNvSpPr/>
+          <p:nvPr/>
+        </p:nvSpPr>
+        <p:spPr>
+          <a:xfrm>
+            <a:off x="457200" y="868680"/>
+            <a:ext cx="6949440" cy="502920"/>
+          </a:xfrm>
+          <a:prstGeom prst="rect">
+            <a:avLst/>
+          </a:prstGeom>
+          <a:noFill/>
+          <a:ln/>
+        </p:spPr>
+        <p:txBody>
+          <a:bodyPr wrap="square" rtlCol="0" anchor="t">
+            <a:normAutofit/>
+          </a:bodyPr>
+          <a:lstStyle/>
+          <a:p>
+            <a:pPr indent="0" marL="0">
+              <a:buNone/>
+            </a:pPr>
+            <a:r>
+              <a:rPr lang="en-US" sz="2200" b="1" dirty="0">
+                <a:solidFill>
+                  <a:srgbClr val="1A1A1A"/>
+                </a:solidFill>
+                <a:latin typeface="Arial" pitchFamily="34" charset="0"/>
+                <a:ea typeface="Arial" pitchFamily="34" charset="-122"/>
+                <a:cs typeface="Arial" pitchFamily="34" charset="-120"/>
+              </a:rPr>
+              <a:t>What makes it different.</a:t>
+            </a:r>
+            <a:endParaRPr lang="en-US" sz="2200" dirty="0"/>
+          </a:p>
+        </p:txBody>
+      </p:sp>
+      <p:sp>
+        <p:nvSpPr>
+          <p:cNvPr id="5" name="Text 3"/>
+          <p:cNvSpPr/>
+          <p:nvPr/>
+        </p:nvSpPr>
+        <p:spPr>
+          <a:xfrm>
+            <a:off x="457200" y="1481328"/>
+            <a:ext cx="6949440" cy="502920"/>
+          </a:xfrm>
+          <a:prstGeom prst="rect">
+            <a:avLst/>
+          </a:prstGeom>
+          <a:noFill/>
+          <a:ln/>
+        </p:spPr>
+        <p:txBody>
+          <a:bodyPr wrap="square" rtlCol="0" anchor="t">
+            <a:normAutofit/>
+          </a:bodyPr>
+          <a:lstStyle/>
+          <a:p>
+            <a:pPr indent="0" marL="0">
+              <a:buNone/>
+            </a:pPr>
+            <a:r>
+              <a:rPr lang="en-US" sz="1300" dirty="0">
+                <a:solidFill>
+                  <a:srgbClr val="4A4A4A"/>
+                </a:solidFill>
+                <a:latin typeface="Arial" pitchFamily="34" charset="0"/>
+                <a:ea typeface="Arial" pitchFamily="34" charset="-122"/>
+                <a:cs typeface="Arial" pitchFamily="34" charset="-120"/>
+              </a:rPr>
+              <a:t>Four product fundamentals that separate Professional Logo Design from free tools, freelancers, and AI generators.</a:t>
+            </a:r>
+            <a:endParaRPr lang="en-US" sz="1300" dirty="0"/>
+          </a:p>
+        </p:txBody>
+      </p:sp>
+      <p:sp>
+        <p:nvSpPr>
+          <p:cNvPr id="6" name="Text 4"/>
+          <p:cNvSpPr/>
+          <p:nvPr/>
+        </p:nvSpPr>
+        <p:spPr>
+          <a:xfrm>
+            <a:off x="457200" y="2121408"/>
+            <a:ext cx="6949440" cy="502920"/>
+          </a:xfrm>
+          <a:prstGeom prst="rect">
+            <a:avLst/>
+          </a:prstGeom>
+          <a:noFill/>
+          <a:ln/>
+        </p:spPr>
+        <p:txBody>
+          <a:bodyPr wrap="square" rtlCol="0" anchor="t">
+            <a:normAutofit/>
+          </a:bodyPr>
+          <a:lstStyle/>
+          <a:p>
+            <a:pPr indent="0" marL="0">
+              <a:buNone/>
+            </a:pPr>
+            <a:r>
+              <a:rPr lang="en-US" sz="1600" b="1" dirty="0">
+                <a:solidFill>
+                  <a:srgbClr val="1A1A1A"/>
+                </a:solidFill>
+                <a:latin typeface="Arial" pitchFamily="34" charset="0"/>
+                <a:ea typeface="Arial" pitchFamily="34" charset="-122"/>
+                <a:cs typeface="Arial" pitchFamily="34" charset="-120"/>
+              </a:rPr>
+              <a:t>People, not prompts.</a:t>
+            </a:r>
+            <a:endParaRPr lang="en-US" sz="1600" dirty="0"/>
+          </a:p>
+        </p:txBody>
+      </p:sp>
+      <p:sp>
+        <p:nvSpPr>
+          <p:cNvPr id="7" name="Text 5"/>
+          <p:cNvSpPr/>
+          <p:nvPr/>
+        </p:nvSpPr>
+        <p:spPr>
+          <a:xfrm>
+            <a:off x="457200" y="2734056"/>
+            <a:ext cx="6949440" cy="605028"/>
+          </a:xfrm>
+          <a:prstGeom prst="rect">
+            <a:avLst/>
+          </a:prstGeom>
+          <a:noFill/>
+          <a:ln/>
+        </p:spPr>
+        <p:txBody>
+          <a:bodyPr wrap="square" rtlCol="0" anchor="t">
+            <a:normAutofit/>
+          </a:bodyPr>
+          <a:lstStyle/>
+          <a:p>
+            <a:pPr indent="0" marL="0">
+              <a:buNone/>
+            </a:pPr>
+            <a:r>
+              <a:rPr lang="en-US" sz="1300" dirty="0">
+                <a:solidFill>
+                  <a:srgbClr val="4A4A4A"/>
+                </a:solidFill>
+                <a:latin typeface="Arial" pitchFamily="34" charset="0"/>
+                <a:ea typeface="Arial" pitchFamily="34" charset="-122"/>
+                <a:cs typeface="Arial" pitchFamily="34" charset="-120"/>
+              </a:rPr>
+              <a:t>Ten-plus years of experience and 75,000+ logos delivered. By 2025, 20% of all logos are AI-generated — which makes human-designed marks more differentiated, not less.</a:t>
+            </a:r>
+            <a:endParaRPr lang="en-US" sz="1300" dirty="0"/>
+          </a:p>
+        </p:txBody>
+      </p:sp>
+      <p:sp>
+        <p:nvSpPr>
+          <p:cNvPr id="8" name="Text 6"/>
+          <p:cNvSpPr/>
+          <p:nvPr/>
+        </p:nvSpPr>
+        <p:spPr>
+          <a:xfrm>
+            <a:off x="457200" y="3476244"/>
+            <a:ext cx="6949440" cy="502920"/>
+          </a:xfrm>
+          <a:prstGeom prst="rect">
+            <a:avLst/>
+          </a:prstGeom>
+          <a:noFill/>
+          <a:ln/>
+        </p:spPr>
+        <p:txBody>
+          <a:bodyPr wrap="square" rtlCol="0" anchor="t">
+            <a:normAutofit/>
+          </a:bodyPr>
+          <a:lstStyle/>
+          <a:p>
+            <a:pPr indent="0" marL="0">
+              <a:buNone/>
+            </a:pPr>
+            <a:r>
+              <a:rPr lang="en-US" sz="1600" b="1" dirty="0">
+                <a:solidFill>
+                  <a:srgbClr val="1A1A1A"/>
+                </a:solidFill>
+                <a:latin typeface="Arial" pitchFamily="34" charset="0"/>
+                <a:ea typeface="Arial" pitchFamily="34" charset="-122"/>
+                <a:cs typeface="Arial" pitchFamily="34" charset="-120"/>
+              </a:rPr>
+              <a:t>The customer owns the mark outright.</a:t>
+            </a:r>
+            <a:endParaRPr lang="en-US" sz="1600" dirty="0"/>
+          </a:p>
+        </p:txBody>
+      </p:sp>
+      <p:sp>
+        <p:nvSpPr>
+          <p:cNvPr id="9" name="Text 7"/>
+          <p:cNvSpPr/>
+          <p:nvPr/>
+        </p:nvSpPr>
+        <p:spPr>
+          <a:xfrm>
+            <a:off x="457200" y="4088892"/>
+            <a:ext cx="6949440" cy="502920"/>
+          </a:xfrm>
+          <a:prstGeom prst="rect">
+            <a:avLst/>
+          </a:prstGeom>
+          <a:noFill/>
+          <a:ln/>
+        </p:spPr>
+        <p:txBody>
+          <a:bodyPr wrap="square" rtlCol="0" anchor="t">
+            <a:normAutofit/>
+          </a:bodyPr>
+          <a:lstStyle/>
+          <a:p>
+            <a:pPr indent="0" marL="0">
+              <a:buNone/>
+            </a:pPr>
+            <a:r>
+              <a:rPr lang="en-US" sz="1300" dirty="0">
+                <a:solidFill>
+                  <a:srgbClr val="4A4A4A"/>
+                </a:solidFill>
+                <a:latin typeface="Arial" pitchFamily="34" charset="0"/>
+                <a:ea typeface="Arial" pitchFamily="34" charset="-122"/>
+                <a:cs typeface="Arial" pitchFamily="34" charset="-120"/>
+              </a:rPr>
+              <a:t>Trademark-able. Royalty-free. A formal rights-transfer letter is included with every project. Free logo tools rarely transfer full rights.</a:t>
+            </a:r>
+            <a:endParaRPr lang="en-US" sz="1300" dirty="0"/>
+          </a:p>
+        </p:txBody>
+      </p:sp>
+      <p:sp>
+        <p:nvSpPr>
+          <p:cNvPr id="10" name="Text 8"/>
+          <p:cNvSpPr/>
+          <p:nvPr/>
+        </p:nvSpPr>
+        <p:spPr>
+          <a:xfrm>
+            <a:off x="457200" y="4728972"/>
+            <a:ext cx="6949440" cy="502920"/>
+          </a:xfrm>
+          <a:prstGeom prst="rect">
+            <a:avLst/>
+          </a:prstGeom>
+          <a:noFill/>
+          <a:ln/>
+        </p:spPr>
+        <p:txBody>
+          <a:bodyPr wrap="square" rtlCol="0" anchor="t">
+            <a:normAutofit/>
+          </a:bodyPr>
+          <a:lstStyle/>
+          <a:p>
+            <a:pPr indent="0" marL="0">
+              <a:buNone/>
+            </a:pPr>
+            <a:r>
+              <a:rPr lang="en-US" sz="1600" b="1" dirty="0">
+                <a:solidFill>
+                  <a:srgbClr val="1A1A1A"/>
+                </a:solidFill>
+                <a:latin typeface="Arial" pitchFamily="34" charset="0"/>
+                <a:ea typeface="Arial" pitchFamily="34" charset="-122"/>
+                <a:cs typeface="Arial" pitchFamily="34" charset="-120"/>
+              </a:rPr>
+              <a:t>Ready for every application.</a:t>
+            </a:r>
+            <a:endParaRPr lang="en-US" sz="1600" dirty="0"/>
+          </a:p>
+        </p:txBody>
+      </p:sp>
+      <p:sp>
+        <p:nvSpPr>
+          <p:cNvPr id="11" name="Text 9"/>
+          <p:cNvSpPr/>
+          <p:nvPr/>
+        </p:nvSpPr>
+        <p:spPr>
+          <a:xfrm>
+            <a:off x="457200" y="5341620"/>
+            <a:ext cx="6949440" cy="502920"/>
+          </a:xfrm>
+          <a:prstGeom prst="rect">
+            <a:avLst/>
+          </a:prstGeom>
+          <a:noFill/>
+          <a:ln/>
+        </p:spPr>
+        <p:txBody>
+          <a:bodyPr wrap="square" rtlCol="0" anchor="t">
+            <a:normAutofit/>
+          </a:bodyPr>
+          <a:lstStyle/>
+          <a:p>
+            <a:pPr indent="0" marL="0">
+              <a:buNone/>
+            </a:pPr>
+            <a:r>
+              <a:rPr lang="en-US" sz="1300" dirty="0">
+                <a:solidFill>
+                  <a:srgbClr val="4A4A4A"/>
+                </a:solidFill>
+                <a:latin typeface="Arial" pitchFamily="34" charset="0"/>
+                <a:ea typeface="Arial" pitchFamily="34" charset="-122"/>
+                <a:cs typeface="Arial" pitchFamily="34" charset="-120"/>
+              </a:rPr>
+              <a:t>AI, EPS, PDF, JPG, PNG, GIF, and ICO — six color versions and five black-and-white. Web, print, merchandise, social, signage.</a:t>
+            </a:r>
+            <a:endParaRPr lang="en-US" sz="1300" dirty="0"/>
+          </a:p>
+        </p:txBody>
+      </p:sp>
+      <p:sp>
+        <p:nvSpPr>
+          <p:cNvPr id="12" name="Text 10"/>
+          <p:cNvSpPr/>
+          <p:nvPr/>
+        </p:nvSpPr>
+        <p:spPr>
+          <a:xfrm>
+            <a:off x="457200" y="5981700"/>
+            <a:ext cx="6949440" cy="502920"/>
+          </a:xfrm>
+          <a:prstGeom prst="rect">
+            <a:avLst/>
+          </a:prstGeom>
+          <a:noFill/>
+          <a:ln/>
+        </p:spPr>
+        <p:txBody>
+          <a:bodyPr wrap="square" rtlCol="0" anchor="t">
+            <a:normAutofit/>
+          </a:bodyPr>
+          <a:lstStyle/>
+          <a:p>
+            <a:pPr indent="0" marL="0">
+              <a:buNone/>
+            </a:pPr>
+            <a:r>
+              <a:rPr lang="en-US" sz="1600" b="1" dirty="0">
+                <a:solidFill>
+                  <a:srgbClr val="1A1A1A"/>
+                </a:solidFill>
+                <a:latin typeface="Arial" pitchFamily="34" charset="0"/>
+                <a:ea typeface="Arial" pitchFamily="34" charset="-122"/>
+                <a:cs typeface="Arial" pitchFamily="34" charset="-120"/>
+              </a:rPr>
+              <a:t>Initial concepts in three to five business days.</a:t>
+            </a:r>
+            <a:endParaRPr lang="en-US" sz="1600" dirty="0"/>
+          </a:p>
+        </p:txBody>
+      </p:sp>
       <p:pic>
         <p:nvPicPr>
-          <p:cNvPr id="4" name="Image 0" descr="preencoded.png">    </p:cNvPr>
+          <p:cNvPr id="13" name="Image 0" descr="preencoded.png">    </p:cNvPr>
           <p:cNvPicPr>
             <a:picLocks noChangeAspect="1"/>
           </p:cNvPicPr>
@@ -3058,8 +5401,8 @@
         </p:blipFill>
         <p:spPr>
           <a:xfrm>
-            <a:off x="7772400" y="1097280"/>
-            <a:ext cx="3657600" cy="2286000"/>
+            <a:off x="7680960" y="1005840"/>
+            <a:ext cx="3840480" cy="2560320"/>
           </a:xfrm>
           <a:prstGeom prst="rect">
             <a:avLst/>
@@ -3176,9 +5519,132 @@
           </a:p>
         </p:txBody>
       </p:sp>
+      <p:sp>
+        <p:nvSpPr>
+          <p:cNvPr id="4" name="Text 2"/>
+          <p:cNvSpPr/>
+          <p:nvPr/>
+        </p:nvSpPr>
+        <p:spPr>
+          <a:xfrm>
+            <a:off x="457200" y="868680"/>
+            <a:ext cx="6949440" cy="502920"/>
+          </a:xfrm>
+          <a:prstGeom prst="rect">
+            <a:avLst/>
+          </a:prstGeom>
+          <a:noFill/>
+          <a:ln/>
+        </p:spPr>
+        <p:txBody>
+          <a:bodyPr wrap="square" rtlCol="0" anchor="t">
+            <a:normAutofit/>
+          </a:bodyPr>
+          <a:lstStyle/>
+          <a:p>
+            <a:pPr indent="0" marL="0">
+              <a:buNone/>
+            </a:pPr>
+            <a:r>
+              <a:rPr lang="en-US" sz="2200" b="1" dirty="0">
+                <a:solidFill>
+                  <a:srgbClr val="1A1A1A"/>
+                </a:solidFill>
+                <a:latin typeface="Arial" pitchFamily="34" charset="0"/>
+                <a:ea typeface="Arial" pitchFamily="34" charset="-122"/>
+                <a:cs typeface="Arial" pitchFamily="34" charset="-120"/>
+              </a:rPr>
+              <a:t>A few of the brands we've built.</a:t>
+            </a:r>
+            <a:endParaRPr lang="en-US" sz="2200" dirty="0"/>
+          </a:p>
+        </p:txBody>
+      </p:sp>
+      <p:sp>
+        <p:nvSpPr>
+          <p:cNvPr id="5" name="Text 3"/>
+          <p:cNvSpPr/>
+          <p:nvPr/>
+        </p:nvSpPr>
+        <p:spPr>
+          <a:xfrm>
+            <a:off x="457200" y="1481328"/>
+            <a:ext cx="6949440" cy="502920"/>
+          </a:xfrm>
+          <a:prstGeom prst="rect">
+            <a:avLst/>
+          </a:prstGeom>
+          <a:noFill/>
+          <a:ln/>
+        </p:spPr>
+        <p:txBody>
+          <a:bodyPr wrap="square" rtlCol="0" anchor="t">
+            <a:normAutofit/>
+          </a:bodyPr>
+          <a:lstStyle/>
+          <a:p>
+            <a:pPr indent="0" marL="0">
+              <a:buNone/>
+            </a:pPr>
+            <a:r>
+              <a:rPr lang="en-US" sz="1600" b="1" dirty="0">
+                <a:solidFill>
+                  <a:srgbClr val="1A1A1A"/>
+                </a:solidFill>
+                <a:latin typeface="Arial" pitchFamily="34" charset="0"/>
+                <a:ea typeface="Arial" pitchFamily="34" charset="-122"/>
+                <a:cs typeface="Arial" pitchFamily="34" charset="-120"/>
+              </a:rPr>
+              <a:t>Logos delivered</a:t>
+            </a:r>
+            <a:endParaRPr lang="en-US" sz="1600" dirty="0"/>
+          </a:p>
+        </p:txBody>
+      </p:sp>
+      <p:sp>
+        <p:nvSpPr>
+          <p:cNvPr id="6" name="Text 4"/>
+          <p:cNvSpPr/>
+          <p:nvPr/>
+        </p:nvSpPr>
+        <p:spPr>
+          <a:xfrm>
+            <a:off x="457200" y="2093976"/>
+            <a:ext cx="6949440" cy="502920"/>
+          </a:xfrm>
+          <a:prstGeom prst="rect">
+            <a:avLst/>
+          </a:prstGeom>
+          <a:noFill/>
+          <a:ln/>
+        </p:spPr>
+        <p:txBody>
+          <a:bodyPr wrap="square" rtlCol="0" anchor="t">
+            <a:normAutofit/>
+          </a:bodyPr>
+          <a:lstStyle/>
+          <a:p>
+            <a:pPr indent="0" marL="0">
+              <a:buNone/>
+            </a:pPr>
+            <a:r>
+              <a:rPr lang="en-US" sz="1600" b="1" dirty="0">
+                <a:solidFill>
+                  <a:srgbClr val="1A1A1A"/>
+                </a:solidFill>
+                <a:latin typeface="Arial" pitchFamily="34" charset="0"/>
+                <a:ea typeface="Arial" pitchFamily="34" charset="-122"/>
+                <a:cs typeface="Arial" pitchFamily="34" charset="-120"/>
+              </a:rPr>
+              <a:t>Verticals</a:t>
+            </a:r>
+            <a:endParaRPr lang="en-US" sz="1600" dirty="0"/>
+          </a:p>
+        </p:txBody>
+      </p:sp>
       <p:pic>
         <p:nvPicPr>
-          <p:cNvPr id="4" name="Image 0" descr="preencoded.png">    </p:cNvPr>
+          <p:cNvPr id="7" name="Image 0" descr="preencoded.png">    </p:cNvPr>
           <p:cNvPicPr>
             <a:picLocks noChangeAspect="1"/>
           </p:cNvPicPr>
@@ -3192,8 +5658,200 @@
         </p:blipFill>
         <p:spPr>
           <a:xfrm>
-            <a:off x="7772400" y="1097280"/>
-            <a:ext cx="3657600" cy="2286000"/>
+            <a:off x="7498080" y="914400"/>
+            <a:ext cx="3474720" cy="1463040"/>
+          </a:xfrm>
+          <a:prstGeom prst="rect">
+            <a:avLst/>
+          </a:prstGeom>
+        </p:spPr>
+      </p:pic>
+      <p:pic>
+        <p:nvPicPr>
+          <p:cNvPr id="8" name="Image 1" descr="preencoded.png">    </p:cNvPr>
+          <p:cNvPicPr>
+            <a:picLocks noChangeAspect="1"/>
+          </p:cNvPicPr>
+          <p:nvPr/>
+        </p:nvPicPr>
+        <p:blipFill>
+          <a:blip r:embed="rId2"/>
+          <a:stretch>
+            <a:fillRect/>
+          </a:stretch>
+        </p:blipFill>
+        <p:spPr>
+          <a:xfrm>
+            <a:off x="11109960" y="914400"/>
+            <a:ext cx="3474720" cy="1463040"/>
+          </a:xfrm>
+          <a:prstGeom prst="rect">
+            <a:avLst/>
+          </a:prstGeom>
+        </p:spPr>
+      </p:pic>
+      <p:pic>
+        <p:nvPicPr>
+          <p:cNvPr id="9" name="Image 2" descr="preencoded.png">    </p:cNvPr>
+          <p:cNvPicPr>
+            <a:picLocks noChangeAspect="1"/>
+          </p:cNvPicPr>
+          <p:nvPr/>
+        </p:nvPicPr>
+        <p:blipFill>
+          <a:blip r:embed="rId3"/>
+          <a:stretch>
+            <a:fillRect/>
+          </a:stretch>
+        </p:blipFill>
+        <p:spPr>
+          <a:xfrm>
+            <a:off x="14721840" y="914400"/>
+            <a:ext cx="3474720" cy="1463040"/>
+          </a:xfrm>
+          <a:prstGeom prst="rect">
+            <a:avLst/>
+          </a:prstGeom>
+        </p:spPr>
+      </p:pic>
+      <p:pic>
+        <p:nvPicPr>
+          <p:cNvPr id="10" name="Image 3" descr="preencoded.png">    </p:cNvPr>
+          <p:cNvPicPr>
+            <a:picLocks noChangeAspect="1"/>
+          </p:cNvPicPr>
+          <p:nvPr/>
+        </p:nvPicPr>
+        <p:blipFill>
+          <a:blip r:embed="rId4"/>
+          <a:stretch>
+            <a:fillRect/>
+          </a:stretch>
+        </p:blipFill>
+        <p:spPr>
+          <a:xfrm>
+            <a:off x="7498080" y="2514600"/>
+            <a:ext cx="3474720" cy="1463040"/>
+          </a:xfrm>
+          <a:prstGeom prst="rect">
+            <a:avLst/>
+          </a:prstGeom>
+        </p:spPr>
+      </p:pic>
+      <p:pic>
+        <p:nvPicPr>
+          <p:cNvPr id="11" name="Image 4" descr="preencoded.png">    </p:cNvPr>
+          <p:cNvPicPr>
+            <a:picLocks noChangeAspect="1"/>
+          </p:cNvPicPr>
+          <p:nvPr/>
+        </p:nvPicPr>
+        <p:blipFill>
+          <a:blip r:embed="rId5"/>
+          <a:stretch>
+            <a:fillRect/>
+          </a:stretch>
+        </p:blipFill>
+        <p:spPr>
+          <a:xfrm>
+            <a:off x="11109960" y="2514600"/>
+            <a:ext cx="3474720" cy="1463040"/>
+          </a:xfrm>
+          <a:prstGeom prst="rect">
+            <a:avLst/>
+          </a:prstGeom>
+        </p:spPr>
+      </p:pic>
+      <p:pic>
+        <p:nvPicPr>
+          <p:cNvPr id="12" name="Image 5" descr="preencoded.png">    </p:cNvPr>
+          <p:cNvPicPr>
+            <a:picLocks noChangeAspect="1"/>
+          </p:cNvPicPr>
+          <p:nvPr/>
+        </p:nvPicPr>
+        <p:blipFill>
+          <a:blip r:embed="rId6"/>
+          <a:stretch>
+            <a:fillRect/>
+          </a:stretch>
+        </p:blipFill>
+        <p:spPr>
+          <a:xfrm>
+            <a:off x="14721840" y="2514600"/>
+            <a:ext cx="3474720" cy="1463040"/>
+          </a:xfrm>
+          <a:prstGeom prst="rect">
+            <a:avLst/>
+          </a:prstGeom>
+        </p:spPr>
+      </p:pic>
+      <p:pic>
+        <p:nvPicPr>
+          <p:cNvPr id="13" name="Image 6" descr="preencoded.png">    </p:cNvPr>
+          <p:cNvPicPr>
+            <a:picLocks noChangeAspect="1"/>
+          </p:cNvPicPr>
+          <p:nvPr/>
+        </p:nvPicPr>
+        <p:blipFill>
+          <a:blip r:embed="rId7"/>
+          <a:stretch>
+            <a:fillRect/>
+          </a:stretch>
+        </p:blipFill>
+        <p:spPr>
+          <a:xfrm>
+            <a:off x="7498080" y="4114800"/>
+            <a:ext cx="3474720" cy="1463040"/>
+          </a:xfrm>
+          <a:prstGeom prst="rect">
+            <a:avLst/>
+          </a:prstGeom>
+        </p:spPr>
+      </p:pic>
+      <p:pic>
+        <p:nvPicPr>
+          <p:cNvPr id="14" name="Image 7" descr="preencoded.png">    </p:cNvPr>
+          <p:cNvPicPr>
+            <a:picLocks noChangeAspect="1"/>
+          </p:cNvPicPr>
+          <p:nvPr/>
+        </p:nvPicPr>
+        <p:blipFill>
+          <a:blip r:embed="rId8"/>
+          <a:stretch>
+            <a:fillRect/>
+          </a:stretch>
+        </p:blipFill>
+        <p:spPr>
+          <a:xfrm>
+            <a:off x="11109960" y="4114800"/>
+            <a:ext cx="3474720" cy="1463040"/>
+          </a:xfrm>
+          <a:prstGeom prst="rect">
+            <a:avLst/>
+          </a:prstGeom>
+        </p:spPr>
+      </p:pic>
+      <p:pic>
+        <p:nvPicPr>
+          <p:cNvPr id="15" name="Image 8" descr="preencoded.png">    </p:cNvPr>
+          <p:cNvPicPr>
+            <a:picLocks noChangeAspect="1"/>
+          </p:cNvPicPr>
+          <p:nvPr/>
+        </p:nvPicPr>
+        <p:blipFill>
+          <a:blip r:embed="rId9"/>
+          <a:stretch>
+            <a:fillRect/>
+          </a:stretch>
+        </p:blipFill>
+        <p:spPr>
+          <a:xfrm>
+            <a:off x="14721840" y="4114800"/>
+            <a:ext cx="3474720" cy="1463040"/>
           </a:xfrm>
           <a:prstGeom prst="rect">
             <a:avLst/>
@@ -3310,9 +5968,378 @@
           </a:p>
         </p:txBody>
       </p:sp>
+      <p:sp>
+        <p:nvSpPr>
+          <p:cNvPr id="4" name="Text 2"/>
+          <p:cNvSpPr/>
+          <p:nvPr/>
+        </p:nvSpPr>
+        <p:spPr>
+          <a:xfrm>
+            <a:off x="457200" y="868680"/>
+            <a:ext cx="6949440" cy="502920"/>
+          </a:xfrm>
+          <a:prstGeom prst="rect">
+            <a:avLst/>
+          </a:prstGeom>
+          <a:noFill/>
+          <a:ln/>
+        </p:spPr>
+        <p:txBody>
+          <a:bodyPr wrap="square" rtlCol="0" anchor="t">
+            <a:normAutofit/>
+          </a:bodyPr>
+          <a:lstStyle/>
+          <a:p>
+            <a:pPr indent="0" marL="0">
+              <a:buNone/>
+            </a:pPr>
+            <a:r>
+              <a:rPr lang="en-US" sz="2200" b="1" dirty="0">
+                <a:solidFill>
+                  <a:srgbClr val="1A1A1A"/>
+                </a:solidFill>
+                <a:latin typeface="Arial" pitchFamily="34" charset="0"/>
+                <a:ea typeface="Arial" pitchFamily="34" charset="-122"/>
+                <a:cs typeface="Arial" pitchFamily="34" charset="-120"/>
+              </a:rPr>
+              <a:t>The creative process</a:t>
+            </a:r>
+            <a:endParaRPr lang="en-US" sz="2200" dirty="0"/>
+          </a:p>
+        </p:txBody>
+      </p:sp>
+      <p:sp>
+        <p:nvSpPr>
+          <p:cNvPr id="5" name="Text 3"/>
+          <p:cNvSpPr/>
+          <p:nvPr/>
+        </p:nvSpPr>
+        <p:spPr>
+          <a:xfrm>
+            <a:off x="457200" y="1481328"/>
+            <a:ext cx="6949440" cy="502920"/>
+          </a:xfrm>
+          <a:prstGeom prst="rect">
+            <a:avLst/>
+          </a:prstGeom>
+          <a:noFill/>
+          <a:ln/>
+        </p:spPr>
+        <p:txBody>
+          <a:bodyPr wrap="square" rtlCol="0" anchor="t">
+            <a:normAutofit/>
+          </a:bodyPr>
+          <a:lstStyle/>
+          <a:p>
+            <a:pPr indent="0" marL="0">
+              <a:buNone/>
+            </a:pPr>
+            <a:r>
+              <a:rPr lang="en-US" sz="2200" b="1" dirty="0">
+                <a:solidFill>
+                  <a:srgbClr val="1A1A1A"/>
+                </a:solidFill>
+                <a:latin typeface="Arial" pitchFamily="34" charset="0"/>
+                <a:ea typeface="Arial" pitchFamily="34" charset="-122"/>
+                <a:cs typeface="Arial" pitchFamily="34" charset="-120"/>
+              </a:rPr>
+              <a:t>From brief to final files.</a:t>
+            </a:r>
+            <a:endParaRPr lang="en-US" sz="2200" dirty="0"/>
+          </a:p>
+        </p:txBody>
+      </p:sp>
+      <p:sp>
+        <p:nvSpPr>
+          <p:cNvPr id="6" name="Text 4"/>
+          <p:cNvSpPr/>
+          <p:nvPr/>
+        </p:nvSpPr>
+        <p:spPr>
+          <a:xfrm>
+            <a:off x="457200" y="2093976"/>
+            <a:ext cx="6949440" cy="502920"/>
+          </a:xfrm>
+          <a:prstGeom prst="rect">
+            <a:avLst/>
+          </a:prstGeom>
+          <a:noFill/>
+          <a:ln/>
+        </p:spPr>
+        <p:txBody>
+          <a:bodyPr wrap="square" rtlCol="0" anchor="t">
+            <a:normAutofit/>
+          </a:bodyPr>
+          <a:lstStyle/>
+          <a:p>
+            <a:pPr indent="0" marL="0">
+              <a:buNone/>
+            </a:pPr>
+            <a:r>
+              <a:rPr lang="en-US" sz="1600" b="1" dirty="0">
+                <a:solidFill>
+                  <a:srgbClr val="1A1A1A"/>
+                </a:solidFill>
+                <a:latin typeface="Arial" pitchFamily="34" charset="0"/>
+                <a:ea typeface="Arial" pitchFamily="34" charset="-122"/>
+                <a:cs typeface="Arial" pitchFamily="34" charset="-120"/>
+              </a:rPr>
+              <a:t>Purchase &amp; welcome</a:t>
+            </a:r>
+            <a:endParaRPr lang="en-US" sz="1600" dirty="0"/>
+          </a:p>
+        </p:txBody>
+      </p:sp>
+      <p:sp>
+        <p:nvSpPr>
+          <p:cNvPr id="7" name="Text 5"/>
+          <p:cNvSpPr/>
+          <p:nvPr/>
+        </p:nvSpPr>
+        <p:spPr>
+          <a:xfrm>
+            <a:off x="457200" y="2706624"/>
+            <a:ext cx="6949440" cy="502920"/>
+          </a:xfrm>
+          <a:prstGeom prst="rect">
+            <a:avLst/>
+          </a:prstGeom>
+          <a:noFill/>
+          <a:ln/>
+        </p:spPr>
+        <p:txBody>
+          <a:bodyPr wrap="square" rtlCol="0" anchor="t">
+            <a:normAutofit/>
+          </a:bodyPr>
+          <a:lstStyle/>
+          <a:p>
+            <a:pPr indent="0" marL="0">
+              <a:buNone/>
+            </a:pPr>
+            <a:r>
+              <a:rPr lang="en-US" sz="1300" dirty="0">
+                <a:solidFill>
+                  <a:srgbClr val="4A4A4A"/>
+                </a:solidFill>
+                <a:latin typeface="Arial" pitchFamily="34" charset="0"/>
+                <a:ea typeface="Arial" pitchFamily="34" charset="-122"/>
+                <a:cs typeface="Arial" pitchFamily="34" charset="-120"/>
+              </a:rPr>
+              <a:t>Customer purchases a plan and receives a welcome email confirming the order.</a:t>
+            </a:r>
+            <a:endParaRPr lang="en-US" sz="1300" dirty="0"/>
+          </a:p>
+        </p:txBody>
+      </p:sp>
+      <p:sp>
+        <p:nvSpPr>
+          <p:cNvPr id="8" name="Text 6"/>
+          <p:cNvSpPr/>
+          <p:nvPr/>
+        </p:nvSpPr>
+        <p:spPr>
+          <a:xfrm>
+            <a:off x="457200" y="3346704"/>
+            <a:ext cx="6949440" cy="502920"/>
+          </a:xfrm>
+          <a:prstGeom prst="rect">
+            <a:avLst/>
+          </a:prstGeom>
+          <a:noFill/>
+          <a:ln/>
+        </p:spPr>
+        <p:txBody>
+          <a:bodyPr wrap="square" rtlCol="0" anchor="t">
+            <a:normAutofit/>
+          </a:bodyPr>
+          <a:lstStyle/>
+          <a:p>
+            <a:pPr indent="0" marL="0">
+              <a:buNone/>
+            </a:pPr>
+            <a:r>
+              <a:rPr lang="en-US" sz="1600" b="1" dirty="0">
+                <a:solidFill>
+                  <a:srgbClr val="1A1A1A"/>
+                </a:solidFill>
+                <a:latin typeface="Arial" pitchFamily="34" charset="0"/>
+                <a:ea typeface="Arial" pitchFamily="34" charset="-122"/>
+                <a:cs typeface="Arial" pitchFamily="34" charset="-120"/>
+              </a:rPr>
+              <a:t>Coordinator outreach</a:t>
+            </a:r>
+            <a:endParaRPr lang="en-US" sz="1600" dirty="0"/>
+          </a:p>
+        </p:txBody>
+      </p:sp>
+      <p:sp>
+        <p:nvSpPr>
+          <p:cNvPr id="9" name="Text 7"/>
+          <p:cNvSpPr/>
+          <p:nvPr/>
+        </p:nvSpPr>
+        <p:spPr>
+          <a:xfrm>
+            <a:off x="457200" y="3959352"/>
+            <a:ext cx="6949440" cy="502920"/>
+          </a:xfrm>
+          <a:prstGeom prst="rect">
+            <a:avLst/>
+          </a:prstGeom>
+          <a:noFill/>
+          <a:ln/>
+        </p:spPr>
+        <p:txBody>
+          <a:bodyPr wrap="square" rtlCol="0" anchor="t">
+            <a:normAutofit/>
+          </a:bodyPr>
+          <a:lstStyle/>
+          <a:p>
+            <a:pPr indent="0" marL="0">
+              <a:buNone/>
+            </a:pPr>
+            <a:r>
+              <a:rPr lang="en-US" sz="1300" dirty="0">
+                <a:solidFill>
+                  <a:srgbClr val="4A4A4A"/>
+                </a:solidFill>
+                <a:latin typeface="Arial" pitchFamily="34" charset="0"/>
+                <a:ea typeface="Arial" pitchFamily="34" charset="-122"/>
+                <a:cs typeface="Arial" pitchFamily="34" charset="-120"/>
+              </a:rPr>
+              <a:t>A dedicated Logo Design Coordinator collects the creative brief — goals, style, colors, references.</a:t>
+            </a:r>
+            <a:endParaRPr lang="en-US" sz="1300" dirty="0"/>
+          </a:p>
+        </p:txBody>
+      </p:sp>
+      <p:sp>
+        <p:nvSpPr>
+          <p:cNvPr id="10" name="Text 8"/>
+          <p:cNvSpPr/>
+          <p:nvPr/>
+        </p:nvSpPr>
+        <p:spPr>
+          <a:xfrm>
+            <a:off x="457200" y="4599432"/>
+            <a:ext cx="6949440" cy="502920"/>
+          </a:xfrm>
+          <a:prstGeom prst="rect">
+            <a:avLst/>
+          </a:prstGeom>
+          <a:noFill/>
+          <a:ln/>
+        </p:spPr>
+        <p:txBody>
+          <a:bodyPr wrap="square" rtlCol="0" anchor="t">
+            <a:normAutofit/>
+          </a:bodyPr>
+          <a:lstStyle/>
+          <a:p>
+            <a:pPr indent="0" marL="0">
+              <a:buNone/>
+            </a:pPr>
+            <a:r>
+              <a:rPr lang="en-US" sz="1600" b="1" dirty="0">
+                <a:solidFill>
+                  <a:srgbClr val="1A1A1A"/>
+                </a:solidFill>
+                <a:latin typeface="Arial" pitchFamily="34" charset="0"/>
+                <a:ea typeface="Arial" pitchFamily="34" charset="-122"/>
+                <a:cs typeface="Arial" pitchFamily="34" charset="-120"/>
+              </a:rPr>
+              <a:t>Initial concepts</a:t>
+            </a:r>
+            <a:endParaRPr lang="en-US" sz="1600" dirty="0"/>
+          </a:p>
+        </p:txBody>
+      </p:sp>
+      <p:sp>
+        <p:nvSpPr>
+          <p:cNvPr id="11" name="Text 9"/>
+          <p:cNvSpPr/>
+          <p:nvPr/>
+        </p:nvSpPr>
+        <p:spPr>
+          <a:xfrm>
+            <a:off x="457200" y="5212080"/>
+            <a:ext cx="6949440" cy="502920"/>
+          </a:xfrm>
+          <a:prstGeom prst="rect">
+            <a:avLst/>
+          </a:prstGeom>
+          <a:noFill/>
+          <a:ln/>
+        </p:spPr>
+        <p:txBody>
+          <a:bodyPr wrap="square" rtlCol="0" anchor="t">
+            <a:normAutofit/>
+          </a:bodyPr>
+          <a:lstStyle/>
+          <a:p>
+            <a:pPr indent="0" marL="0">
+              <a:buNone/>
+            </a:pPr>
+            <a:r>
+              <a:rPr lang="en-US" sz="1300" dirty="0">
+                <a:solidFill>
+                  <a:srgbClr val="4A4A4A"/>
+                </a:solidFill>
+                <a:latin typeface="Arial" pitchFamily="34" charset="0"/>
+                <a:ea typeface="Arial" pitchFamily="34" charset="-122"/>
+                <a:cs typeface="Arial" pitchFamily="34" charset="-120"/>
+              </a:rPr>
+              <a:t>In-house designers deliver up to ten custom concepts based on the brief.</a:t>
+            </a:r>
+            <a:endParaRPr lang="en-US" sz="1300" dirty="0"/>
+          </a:p>
+        </p:txBody>
+      </p:sp>
+      <p:sp>
+        <p:nvSpPr>
+          <p:cNvPr id="12" name="Text 10"/>
+          <p:cNvSpPr/>
+          <p:nvPr/>
+        </p:nvSpPr>
+        <p:spPr>
+          <a:xfrm>
+            <a:off x="457200" y="5852160"/>
+            <a:ext cx="6949440" cy="502920"/>
+          </a:xfrm>
+          <a:prstGeom prst="rect">
+            <a:avLst/>
+          </a:prstGeom>
+          <a:noFill/>
+          <a:ln/>
+        </p:spPr>
+        <p:txBody>
+          <a:bodyPr wrap="square" rtlCol="0" anchor="t">
+            <a:normAutofit/>
+          </a:bodyPr>
+          <a:lstStyle/>
+          <a:p>
+            <a:pPr indent="0" marL="0">
+              <a:buNone/>
+            </a:pPr>
+            <a:r>
+              <a:rPr lang="en-US" sz="1600" b="1" dirty="0">
+                <a:solidFill>
+                  <a:srgbClr val="1A1A1A"/>
+                </a:solidFill>
+                <a:latin typeface="Arial" pitchFamily="34" charset="0"/>
+                <a:ea typeface="Arial" pitchFamily="34" charset="-122"/>
+                <a:cs typeface="Arial" pitchFamily="34" charset="-120"/>
+              </a:rPr>
+              <a:t>Revisions</a:t>
+            </a:r>
+            <a:endParaRPr lang="en-US" sz="1600" dirty="0"/>
+          </a:p>
+        </p:txBody>
+      </p:sp>
       <p:pic>
         <p:nvPicPr>
-          <p:cNvPr id="4" name="Image 0" descr="preencoded.png">    </p:cNvPr>
+          <p:cNvPr id="13" name="Image 0" descr="preencoded.png">    </p:cNvPr>
           <p:cNvPicPr>
             <a:picLocks noChangeAspect="1"/>
           </p:cNvPicPr>
@@ -3326,8 +6353,8 @@
         </p:blipFill>
         <p:spPr>
           <a:xfrm>
-            <a:off x="7772400" y="1097280"/>
-            <a:ext cx="3657600" cy="2286000"/>
+            <a:off x="7680960" y="1005840"/>
+            <a:ext cx="3840480" cy="2560320"/>
           </a:xfrm>
           <a:prstGeom prst="rect">
             <a:avLst/>
@@ -3444,6 +6471,430 @@
           </a:p>
         </p:txBody>
       </p:sp>
+      <p:sp>
+        <p:nvSpPr>
+          <p:cNvPr id="4" name="Text 2"/>
+          <p:cNvSpPr/>
+          <p:nvPr/>
+        </p:nvSpPr>
+        <p:spPr>
+          <a:xfrm>
+            <a:off x="457200" y="868680"/>
+            <a:ext cx="10972800" cy="502920"/>
+          </a:xfrm>
+          <a:prstGeom prst="rect">
+            <a:avLst/>
+          </a:prstGeom>
+          <a:noFill/>
+          <a:ln/>
+        </p:spPr>
+        <p:txBody>
+          <a:bodyPr wrap="square" rtlCol="0" anchor="t">
+            <a:normAutofit/>
+          </a:bodyPr>
+          <a:lstStyle/>
+          <a:p>
+            <a:pPr indent="0" marL="0">
+              <a:buNone/>
+            </a:pPr>
+            <a:r>
+              <a:rPr lang="en-US" sz="2200" b="1" dirty="0">
+                <a:solidFill>
+                  <a:srgbClr val="1A1A1A"/>
+                </a:solidFill>
+                <a:latin typeface="Arial" pitchFamily="34" charset="0"/>
+                <a:ea typeface="Arial" pitchFamily="34" charset="-122"/>
+                <a:cs typeface="Arial" pitchFamily="34" charset="-120"/>
+              </a:rPr>
+              <a:t>Three tiers for every budget.</a:t>
+            </a:r>
+            <a:endParaRPr lang="en-US" sz="2200" dirty="0"/>
+          </a:p>
+        </p:txBody>
+      </p:sp>
+      <p:sp>
+        <p:nvSpPr>
+          <p:cNvPr id="5" name="Text 3"/>
+          <p:cNvSpPr/>
+          <p:nvPr/>
+        </p:nvSpPr>
+        <p:spPr>
+          <a:xfrm>
+            <a:off x="457200" y="1481328"/>
+            <a:ext cx="10972800" cy="502920"/>
+          </a:xfrm>
+          <a:prstGeom prst="rect">
+            <a:avLst/>
+          </a:prstGeom>
+          <a:noFill/>
+          <a:ln/>
+        </p:spPr>
+        <p:txBody>
+          <a:bodyPr wrap="square" rtlCol="0" anchor="t">
+            <a:normAutofit/>
+          </a:bodyPr>
+          <a:lstStyle/>
+          <a:p>
+            <a:pPr indent="0" marL="0">
+              <a:buNone/>
+            </a:pPr>
+            <a:r>
+              <a:rPr lang="en-US" sz="1300" dirty="0">
+                <a:solidFill>
+                  <a:srgbClr val="4A4A4A"/>
+                </a:solidFill>
+                <a:latin typeface="Arial" pitchFamily="34" charset="0"/>
+                <a:ea typeface="Arial" pitchFamily="34" charset="-122"/>
+                <a:cs typeface="Arial" pitchFamily="34" charset="-120"/>
+              </a:rPr>
+              <a:t>All plans include the Logo Design Coordinator, three rounds of revisions, the 11-format file package, and full ownership of the final design.</a:t>
+            </a:r>
+            <a:endParaRPr lang="en-US" sz="1300" dirty="0"/>
+          </a:p>
+        </p:txBody>
+      </p:sp>
+      <p:sp>
+        <p:nvSpPr>
+          <p:cNvPr id="6" name="Text 4"/>
+          <p:cNvSpPr/>
+          <p:nvPr/>
+        </p:nvSpPr>
+        <p:spPr>
+          <a:xfrm>
+            <a:off x="594360" y="2121408"/>
+            <a:ext cx="10789920" cy="1783080"/>
+          </a:xfrm>
+          <a:prstGeom prst="rect">
+            <a:avLst/>
+          </a:prstGeom>
+          <a:noFill/>
+          <a:ln/>
+        </p:spPr>
+        <p:txBody>
+          <a:bodyPr wrap="square" rtlCol="0" anchor="t">
+            <a:normAutofit/>
+          </a:bodyPr>
+          <a:lstStyle/>
+          <a:p>
+            <a:pPr marL="342900" indent="-342900">
+              <a:buSzPct val="100000"/>
+              <a:buChar char="•"/>
+            </a:pPr>
+            <a:r>
+              <a:rPr lang="en-US" sz="1200" dirty="0">
+                <a:solidFill>
+                  <a:srgbClr val="4A4A4A"/>
+                </a:solidFill>
+                <a:latin typeface="Arial" pitchFamily="34" charset="0"/>
+                <a:ea typeface="Arial" pitchFamily="34" charset="-122"/>
+                <a:cs typeface="Arial" pitchFamily="34" charset="-120"/>
+              </a:rPr>
+              <a:t>Logo Design Coordinator</a:t>
+            </a:r>
+            <a:endParaRPr lang="en-US" sz="1200" dirty="0"/>
+          </a:p>
+          <a:p>
+            <a:pPr marL="342900" indent="-342900">
+              <a:buSzPct val="100000"/>
+              <a:buChar char="•"/>
+            </a:pPr>
+            <a:r>
+              <a:rPr lang="en-US" sz="1200" dirty="0">
+                <a:solidFill>
+                  <a:srgbClr val="4A4A4A"/>
+                </a:solidFill>
+                <a:latin typeface="Arial" pitchFamily="34" charset="0"/>
+                <a:ea typeface="Arial" pitchFamily="34" charset="-122"/>
+                <a:cs typeface="Arial" pitchFamily="34" charset="-120"/>
+              </a:rPr>
+              <a:t>4 custom design concepts</a:t>
+            </a:r>
+            <a:endParaRPr lang="en-US" sz="1200" dirty="0"/>
+          </a:p>
+          <a:p>
+            <a:pPr marL="342900" indent="-342900">
+              <a:buSzPct val="100000"/>
+              <a:buChar char="•"/>
+            </a:pPr>
+            <a:r>
+              <a:rPr lang="en-US" sz="1200" dirty="0">
+                <a:solidFill>
+                  <a:srgbClr val="4A4A4A"/>
+                </a:solidFill>
+                <a:latin typeface="Arial" pitchFamily="34" charset="0"/>
+                <a:ea typeface="Arial" pitchFamily="34" charset="-122"/>
+                <a:cs typeface="Arial" pitchFamily="34" charset="-120"/>
+              </a:rPr>
+              <a:t>3 rounds of revisions</a:t>
+            </a:r>
+            <a:endParaRPr lang="en-US" sz="1200" dirty="0"/>
+          </a:p>
+          <a:p>
+            <a:pPr marL="342900" indent="-342900">
+              <a:buSzPct val="100000"/>
+              <a:buChar char="•"/>
+            </a:pPr>
+            <a:r>
+              <a:rPr lang="en-US" sz="1200" dirty="0">
+                <a:solidFill>
+                  <a:srgbClr val="4A4A4A"/>
+                </a:solidFill>
+                <a:latin typeface="Arial" pitchFamily="34" charset="0"/>
+                <a:ea typeface="Arial" pitchFamily="34" charset="-122"/>
+                <a:cs typeface="Arial" pitchFamily="34" charset="-120"/>
+              </a:rPr>
+              <a:t>11 final file formats</a:t>
+            </a:r>
+            <a:endParaRPr lang="en-US" sz="1200" dirty="0"/>
+          </a:p>
+          <a:p>
+            <a:pPr marL="342900" indent="-342900">
+              <a:buSzPct val="100000"/>
+              <a:buChar char="•"/>
+            </a:pPr>
+            <a:r>
+              <a:rPr lang="en-US" sz="1200" dirty="0">
+                <a:solidFill>
+                  <a:srgbClr val="4A4A4A"/>
+                </a:solidFill>
+                <a:latin typeface="Arial" pitchFamily="34" charset="0"/>
+                <a:ea typeface="Arial" pitchFamily="34" charset="-122"/>
+                <a:cs typeface="Arial" pitchFamily="34" charset="-120"/>
+              </a:rPr>
+              <a:t>Full ownership of design</a:t>
+            </a:r>
+            <a:endParaRPr lang="en-US" sz="1200" dirty="0"/>
+          </a:p>
+        </p:txBody>
+      </p:sp>
+      <p:sp>
+        <p:nvSpPr>
+          <p:cNvPr id="7" name="Text 5"/>
+          <p:cNvSpPr/>
+          <p:nvPr/>
+        </p:nvSpPr>
+        <p:spPr>
+          <a:xfrm>
+            <a:off x="594360" y="4041648"/>
+            <a:ext cx="10789920" cy="1783080"/>
+          </a:xfrm>
+          <a:prstGeom prst="rect">
+            <a:avLst/>
+          </a:prstGeom>
+          <a:noFill/>
+          <a:ln/>
+        </p:spPr>
+        <p:txBody>
+          <a:bodyPr wrap="square" rtlCol="0" anchor="t">
+            <a:normAutofit/>
+          </a:bodyPr>
+          <a:lstStyle/>
+          <a:p>
+            <a:pPr marL="342900" indent="-342900">
+              <a:buSzPct val="100000"/>
+              <a:buChar char="•"/>
+            </a:pPr>
+            <a:r>
+              <a:rPr lang="en-US" sz="1200" dirty="0">
+                <a:solidFill>
+                  <a:srgbClr val="4A4A4A"/>
+                </a:solidFill>
+                <a:latin typeface="Arial" pitchFamily="34" charset="0"/>
+                <a:ea typeface="Arial" pitchFamily="34" charset="-122"/>
+                <a:cs typeface="Arial" pitchFamily="34" charset="-120"/>
+              </a:rPr>
+              <a:t>Everything in Bronze</a:t>
+            </a:r>
+            <a:endParaRPr lang="en-US" sz="1200" dirty="0"/>
+          </a:p>
+          <a:p>
+            <a:pPr marL="342900" indent="-342900">
+              <a:buSzPct val="100000"/>
+              <a:buChar char="•"/>
+            </a:pPr>
+            <a:r>
+              <a:rPr lang="en-US" sz="1200" dirty="0">
+                <a:solidFill>
+                  <a:srgbClr val="4A4A4A"/>
+                </a:solidFill>
+                <a:latin typeface="Arial" pitchFamily="34" charset="0"/>
+                <a:ea typeface="Arial" pitchFamily="34" charset="-122"/>
+                <a:cs typeface="Arial" pitchFamily="34" charset="-120"/>
+              </a:rPr>
+              <a:t>6 custom design concepts</a:t>
+            </a:r>
+            <a:endParaRPr lang="en-US" sz="1200" dirty="0"/>
+          </a:p>
+          <a:p>
+            <a:pPr marL="342900" indent="-342900">
+              <a:buSzPct val="100000"/>
+              <a:buChar char="•"/>
+            </a:pPr>
+            <a:r>
+              <a:rPr lang="en-US" sz="1200" dirty="0">
+                <a:solidFill>
+                  <a:srgbClr val="4A4A4A"/>
+                </a:solidFill>
+                <a:latin typeface="Arial" pitchFamily="34" charset="0"/>
+                <a:ea typeface="Arial" pitchFamily="34" charset="-122"/>
+                <a:cs typeface="Arial" pitchFamily="34" charset="-120"/>
+              </a:rPr>
+              <a:t>Business card design</a:t>
+            </a:r>
+            <a:endParaRPr lang="en-US" sz="1200" dirty="0"/>
+          </a:p>
+          <a:p>
+            <a:pPr marL="342900" indent="-342900">
+              <a:buSzPct val="100000"/>
+              <a:buChar char="•"/>
+            </a:pPr>
+            <a:r>
+              <a:rPr lang="en-US" sz="1200" dirty="0">
+                <a:solidFill>
+                  <a:srgbClr val="4A4A4A"/>
+                </a:solidFill>
+                <a:latin typeface="Arial" pitchFamily="34" charset="0"/>
+                <a:ea typeface="Arial" pitchFamily="34" charset="-122"/>
+                <a:cs typeface="Arial" pitchFamily="34" charset="-120"/>
+              </a:rPr>
+              <a:t>Letterhead &amp; envelope</a:t>
+            </a:r>
+            <a:endParaRPr lang="en-US" sz="1200" dirty="0"/>
+          </a:p>
+          <a:p>
+            <a:pPr marL="342900" indent="-342900">
+              <a:buSzPct val="100000"/>
+              <a:buChar char="•"/>
+            </a:pPr>
+            <a:r>
+              <a:rPr lang="en-US" sz="1200" dirty="0">
+                <a:solidFill>
+                  <a:srgbClr val="4A4A4A"/>
+                </a:solidFill>
+                <a:latin typeface="Arial" pitchFamily="34" charset="0"/>
+                <a:ea typeface="Arial" pitchFamily="34" charset="-122"/>
+                <a:cs typeface="Arial" pitchFamily="34" charset="-120"/>
+              </a:rPr>
+              <a:t>Stationery rights included</a:t>
+            </a:r>
+            <a:endParaRPr lang="en-US" sz="1200" dirty="0"/>
+          </a:p>
+        </p:txBody>
+      </p:sp>
+      <p:sp>
+        <p:nvSpPr>
+          <p:cNvPr id="8" name="Text 6"/>
+          <p:cNvSpPr/>
+          <p:nvPr/>
+        </p:nvSpPr>
+        <p:spPr>
+          <a:xfrm>
+            <a:off x="594360" y="5961888"/>
+            <a:ext cx="10789920" cy="1783080"/>
+          </a:xfrm>
+          <a:prstGeom prst="rect">
+            <a:avLst/>
+          </a:prstGeom>
+          <a:noFill/>
+          <a:ln/>
+        </p:spPr>
+        <p:txBody>
+          <a:bodyPr wrap="square" rtlCol="0" anchor="t">
+            <a:normAutofit/>
+          </a:bodyPr>
+          <a:lstStyle/>
+          <a:p>
+            <a:pPr marL="342900" indent="-342900">
+              <a:buSzPct val="100000"/>
+              <a:buChar char="•"/>
+            </a:pPr>
+            <a:r>
+              <a:rPr lang="en-US" sz="1200" dirty="0">
+                <a:solidFill>
+                  <a:srgbClr val="4A4A4A"/>
+                </a:solidFill>
+                <a:latin typeface="Arial" pitchFamily="34" charset="0"/>
+                <a:ea typeface="Arial" pitchFamily="34" charset="-122"/>
+                <a:cs typeface="Arial" pitchFamily="34" charset="-120"/>
+              </a:rPr>
+              <a:t>Everything in Silver</a:t>
+            </a:r>
+            <a:endParaRPr lang="en-US" sz="1200" dirty="0"/>
+          </a:p>
+          <a:p>
+            <a:pPr marL="342900" indent="-342900">
+              <a:buSzPct val="100000"/>
+              <a:buChar char="•"/>
+            </a:pPr>
+            <a:r>
+              <a:rPr lang="en-US" sz="1200" dirty="0">
+                <a:solidFill>
+                  <a:srgbClr val="4A4A4A"/>
+                </a:solidFill>
+                <a:latin typeface="Arial" pitchFamily="34" charset="0"/>
+                <a:ea typeface="Arial" pitchFamily="34" charset="-122"/>
+                <a:cs typeface="Arial" pitchFamily="34" charset="-120"/>
+              </a:rPr>
+              <a:t>10 custom design concepts</a:t>
+            </a:r>
+            <a:endParaRPr lang="en-US" sz="1200" dirty="0"/>
+          </a:p>
+          <a:p>
+            <a:pPr marL="342900" indent="-342900">
+              <a:buSzPct val="100000"/>
+              <a:buChar char="•"/>
+            </a:pPr>
+            <a:r>
+              <a:rPr lang="en-US" sz="1200" dirty="0">
+                <a:solidFill>
+                  <a:srgbClr val="4A4A4A"/>
+                </a:solidFill>
+                <a:latin typeface="Arial" pitchFamily="34" charset="0"/>
+                <a:ea typeface="Arial" pitchFamily="34" charset="-122"/>
+                <a:cs typeface="Arial" pitchFamily="34" charset="-120"/>
+              </a:rPr>
+              <a:t>1,000 printed business cards</a:t>
+            </a:r>
+            <a:endParaRPr lang="en-US" sz="1200" dirty="0"/>
+          </a:p>
+          <a:p>
+            <a:pPr marL="342900" indent="-342900">
+              <a:buSzPct val="100000"/>
+              <a:buChar char="•"/>
+            </a:pPr>
+            <a:r>
+              <a:rPr lang="en-US" sz="1200" dirty="0">
+                <a:solidFill>
+                  <a:srgbClr val="4A4A4A"/>
+                </a:solidFill>
+                <a:latin typeface="Arial" pitchFamily="34" charset="0"/>
+                <a:ea typeface="Arial" pitchFamily="34" charset="-122"/>
+                <a:cs typeface="Arial" pitchFamily="34" charset="-120"/>
+              </a:rPr>
+              <a:t>Branded email signature</a:t>
+            </a:r>
+            <a:endParaRPr lang="en-US" sz="1200" dirty="0"/>
+          </a:p>
+          <a:p>
+            <a:pPr marL="342900" indent="-342900">
+              <a:buSzPct val="100000"/>
+              <a:buChar char="•"/>
+            </a:pPr>
+            <a:r>
+              <a:rPr lang="en-US" sz="1200" dirty="0">
+                <a:solidFill>
+                  <a:srgbClr val="4A4A4A"/>
+                </a:solidFill>
+                <a:latin typeface="Arial" pitchFamily="34" charset="0"/>
+                <a:ea typeface="Arial" pitchFamily="34" charset="-122"/>
+                <a:cs typeface="Arial" pitchFamily="34" charset="-120"/>
+              </a:rPr>
+              <a:t>Premium support</a:t>
+            </a:r>
+            <a:endParaRPr lang="en-US" sz="1200" dirty="0"/>
+          </a:p>
+        </p:txBody>
+      </p:sp>
     </p:spTree>
   </p:cSld>
   <p:clrMapOvr>
@@ -3551,6 +7002,88 @@
               <a:t>09 Discovery</a:t>
             </a:r>
             <a:endParaRPr lang="en-US" sz="1000" dirty="0"/>
+          </a:p>
+        </p:txBody>
+      </p:sp>
+      <p:sp>
+        <p:nvSpPr>
+          <p:cNvPr id="4" name="Text 2"/>
+          <p:cNvSpPr/>
+          <p:nvPr/>
+        </p:nvSpPr>
+        <p:spPr>
+          <a:xfrm>
+            <a:off x="457200" y="868680"/>
+            <a:ext cx="10972800" cy="502920"/>
+          </a:xfrm>
+          <a:prstGeom prst="rect">
+            <a:avLst/>
+          </a:prstGeom>
+          <a:noFill/>
+          <a:ln/>
+        </p:spPr>
+        <p:txBody>
+          <a:bodyPr wrap="square" rtlCol="0" anchor="t">
+            <a:normAutofit/>
+          </a:bodyPr>
+          <a:lstStyle/>
+          <a:p>
+            <a:pPr indent="0" marL="0">
+              <a:buNone/>
+            </a:pPr>
+            <a:r>
+              <a:rPr lang="en-US" sz="2200" b="1" dirty="0">
+                <a:solidFill>
+                  <a:srgbClr val="1A1A1A"/>
+                </a:solidFill>
+                <a:latin typeface="Arial" pitchFamily="34" charset="0"/>
+                <a:ea typeface="Arial" pitchFamily="34" charset="-122"/>
+                <a:cs typeface="Arial" pitchFamily="34" charset="-120"/>
+              </a:rPr>
+              <a:t>Questions to ask on the call.</a:t>
+            </a:r>
+            <a:endParaRPr lang="en-US" sz="2200" dirty="0"/>
+          </a:p>
+        </p:txBody>
+      </p:sp>
+      <p:sp>
+        <p:nvSpPr>
+          <p:cNvPr id="5" name="Text 3"/>
+          <p:cNvSpPr/>
+          <p:nvPr/>
+        </p:nvSpPr>
+        <p:spPr>
+          <a:xfrm>
+            <a:off x="457200" y="1481328"/>
+            <a:ext cx="10972800" cy="502920"/>
+          </a:xfrm>
+          <a:prstGeom prst="rect">
+            <a:avLst/>
+          </a:prstGeom>
+          <a:noFill/>
+          <a:ln/>
+        </p:spPr>
+        <p:txBody>
+          <a:bodyPr wrap="square" rtlCol="0" anchor="t">
+            <a:normAutofit/>
+          </a:bodyPr>
+          <a:lstStyle/>
+          <a:p>
+            <a:pPr indent="0" marL="0">
+              <a:buNone/>
+            </a:pPr>
+            <a:r>
+              <a:rPr lang="en-US" sz="1300" dirty="0">
+                <a:solidFill>
+                  <a:srgbClr val="4A4A4A"/>
+                </a:solidFill>
+                <a:latin typeface="Arial" pitchFamily="34" charset="0"/>
+                <a:ea typeface="Arial" pitchFamily="34" charset="-122"/>
+                <a:cs typeface="Arial" pitchFamily="34" charset="-120"/>
+              </a:rPr>
+              <a:t>Seven questions, in order. The first opens every conversation. The last closes most of them.</a:t>
+            </a:r>
+            <a:endParaRPr lang="en-US" sz="1300" dirty="0"/>
           </a:p>
         </p:txBody>
       </p:sp>
